--- a/rapports/septembre/Cdiscount_Mobile_sept2026.pptx
+++ b/rapports/septembre/Cdiscount_Mobile_sept2026.pptx
@@ -6235,7 +6235,7 @@
         <p:spPr>
           <a:xfrm>
             <a:off x="8296656" y="4389120"/>
-            <a:ext cx="2072640" cy="152400"/>
+            <a:ext cx="2225040" cy="152400"/>
           </a:xfrm>
           <a:prstGeom prst="rect">
             <a:avLst/>
@@ -6256,7 +6256,7 @@
                 </a:solidFill>
                 <a:latin typeface="Arial"/>
               </a:rPr>
-              <a:t>Smartphones</a:t>
+              <a:t>Recherche générale d'un forfait</a:t>
             </a:r>
           </a:p>
         </p:txBody>
@@ -6269,7 +6269,7 @@
         </p:nvSpPr>
         <p:spPr>
           <a:xfrm>
-            <a:off x="8077200" y="4675632"/>
+            <a:off x="8077200" y="4626864"/>
             <a:ext cx="121920" cy="121920"/>
           </a:xfrm>
           <a:prstGeom prst="rect">
@@ -6313,8 +6313,8 @@
         </p:nvSpPr>
         <p:spPr>
           <a:xfrm>
-            <a:off x="8296656" y="4657344"/>
-            <a:ext cx="2072640" cy="152400"/>
+            <a:off x="8296656" y="4608576"/>
+            <a:ext cx="2225040" cy="152400"/>
           </a:xfrm>
           <a:prstGeom prst="rect">
             <a:avLst/>
@@ -6335,7 +6335,7 @@
                 </a:solidFill>
                 <a:latin typeface="Arial"/>
               </a:rPr>
-              <a:t>Accessoires mobiles · 6 %</a:t>
+              <a:t>eSIM et carte SIM · 25 %</a:t>
             </a:r>
           </a:p>
         </p:txBody>
@@ -6348,7 +6348,7 @@
         </p:nvSpPr>
         <p:spPr>
           <a:xfrm>
-            <a:off x="8077200" y="4943856"/>
+            <a:off x="8077200" y="4846320"/>
             <a:ext cx="121920" cy="121920"/>
           </a:xfrm>
           <a:prstGeom prst="rect">
@@ -6392,8 +6392,8 @@
         </p:nvSpPr>
         <p:spPr>
           <a:xfrm>
-            <a:off x="8296656" y="4925568"/>
-            <a:ext cx="2072640" cy="152400"/>
+            <a:off x="8296656" y="4828032"/>
+            <a:ext cx="2225040" cy="152400"/>
           </a:xfrm>
           <a:prstGeom prst="rect">
             <a:avLst/>
@@ -6414,7 +6414,7 @@
                 </a:solidFill>
                 <a:latin typeface="Arial"/>
               </a:rPr>
-              <a:t>Téléphones fixes · 1 %</a:t>
+              <a:t>Prix et sans engagement · 15 %</a:t>
             </a:r>
           </a:p>
         </p:txBody>
@@ -6427,8 +6427,403 @@
         </p:nvSpPr>
         <p:spPr>
           <a:xfrm>
+            <a:off x="8077200" y="5065776"/>
+            <a:ext cx="121920" cy="121920"/>
+          </a:xfrm>
+          <a:prstGeom prst="rect">
+            <a:avLst/>
+          </a:prstGeom>
+          <a:solidFill>
+            <a:srgbClr val="EE6A2C"/>
+          </a:solidFill>
+          <a:ln>
+            <a:noFill/>
+          </a:ln>
+          <a:effectLst/>
+        </p:spPr>
+        <p:style>
+          <a:lnRef idx="1">
+            <a:schemeClr val="accent1"/>
+          </a:lnRef>
+          <a:fillRef idx="3">
+            <a:schemeClr val="accent1"/>
+          </a:fillRef>
+          <a:effectRef idx="2">
+            <a:schemeClr val="accent1"/>
+          </a:effectRef>
+          <a:fontRef idx="minor">
+            <a:schemeClr val="lt1"/>
+          </a:fontRef>
+        </p:style>
+        <p:txBody>
+          <a:bodyPr rtlCol="0" anchor="ctr"/>
+          <a:lstStyle/>
+          <a:p>
+            <a:pPr algn="ctr"/>
+          </a:p>
+        </p:txBody>
+      </p:sp>
+      <p:sp>
+        <p:nvSpPr>
+          <p:cNvPr id="87" name="TextBox 86"/>
+          <p:cNvSpPr txBox="1"/>
+          <p:nvPr/>
+        </p:nvSpPr>
+        <p:spPr>
+          <a:xfrm>
+            <a:off x="8296656" y="5047488"/>
+            <a:ext cx="2225040" cy="152400"/>
+          </a:xfrm>
+          <a:prstGeom prst="rect">
+            <a:avLst/>
+          </a:prstGeom>
+          <a:noFill/>
+        </p:spPr>
+        <p:txBody>
+          <a:bodyPr wrap="square" anchor="t" lIns="0" rIns="0" tIns="0" bIns="0">
+            <a:spAutoFit/>
+          </a:bodyPr>
+          <a:lstStyle/>
+          <a:p>
+            <a:pPr algn="l"/>
+            <a:r>
+              <a:rPr sz="800" b="0" i="0">
+                <a:solidFill>
+                  <a:srgbClr val="111111"/>
+                </a:solidFill>
+                <a:latin typeface="Arial"/>
+              </a:rPr>
+              <a:t>Partage de connexion et nomade · 12 %</a:t>
+            </a:r>
+          </a:p>
+        </p:txBody>
+      </p:sp>
+      <p:sp>
+        <p:nvSpPr>
+          <p:cNvPr id="88" name="Rectangle 87"/>
+          <p:cNvSpPr/>
+          <p:nvPr/>
+        </p:nvSpPr>
+        <p:spPr>
+          <a:xfrm>
+            <a:off x="8077200" y="5285232"/>
+            <a:ext cx="121920" cy="121920"/>
+          </a:xfrm>
+          <a:prstGeom prst="rect">
+            <a:avLst/>
+          </a:prstGeom>
+          <a:solidFill>
+            <a:srgbClr val="3E5A78"/>
+          </a:solidFill>
+          <a:ln>
+            <a:noFill/>
+          </a:ln>
+          <a:effectLst/>
+        </p:spPr>
+        <p:style>
+          <a:lnRef idx="1">
+            <a:schemeClr val="accent1"/>
+          </a:lnRef>
+          <a:fillRef idx="3">
+            <a:schemeClr val="accent1"/>
+          </a:fillRef>
+          <a:effectRef idx="2">
+            <a:schemeClr val="accent1"/>
+          </a:effectRef>
+          <a:fontRef idx="minor">
+            <a:schemeClr val="lt1"/>
+          </a:fontRef>
+        </p:style>
+        <p:txBody>
+          <a:bodyPr rtlCol="0" anchor="ctr"/>
+          <a:lstStyle/>
+          <a:p>
+            <a:pPr algn="ctr"/>
+          </a:p>
+        </p:txBody>
+      </p:sp>
+      <p:sp>
+        <p:nvSpPr>
+          <p:cNvPr id="89" name="TextBox 88"/>
+          <p:cNvSpPr txBox="1"/>
+          <p:nvPr/>
+        </p:nvSpPr>
+        <p:spPr>
+          <a:xfrm>
+            <a:off x="8296656" y="5266944"/>
+            <a:ext cx="2225040" cy="152400"/>
+          </a:xfrm>
+          <a:prstGeom prst="rect">
+            <a:avLst/>
+          </a:prstGeom>
+          <a:noFill/>
+        </p:spPr>
+        <p:txBody>
+          <a:bodyPr wrap="square" anchor="t" lIns="0" rIns="0" tIns="0" bIns="0">
+            <a:spAutoFit/>
+          </a:bodyPr>
+          <a:lstStyle/>
+          <a:p>
+            <a:pPr algn="l"/>
+            <a:r>
+              <a:rPr sz="1000" b="0" i="0">
+                <a:solidFill>
+                  <a:srgbClr val="111111"/>
+                </a:solidFill>
+                <a:latin typeface="Arial"/>
+              </a:rPr>
+              <a:t>5G et volume de data · 6 %</a:t>
+            </a:r>
+          </a:p>
+        </p:txBody>
+      </p:sp>
+      <p:sp>
+        <p:nvSpPr>
+          <p:cNvPr id="90" name="Rectangle 89"/>
+          <p:cNvSpPr/>
+          <p:nvPr/>
+        </p:nvSpPr>
+        <p:spPr>
+          <a:xfrm>
+            <a:off x="8077200" y="5504688"/>
+            <a:ext cx="121920" cy="121920"/>
+          </a:xfrm>
+          <a:prstGeom prst="rect">
+            <a:avLst/>
+          </a:prstGeom>
+          <a:solidFill>
+            <a:srgbClr val="A09278"/>
+          </a:solidFill>
+          <a:ln>
+            <a:noFill/>
+          </a:ln>
+          <a:effectLst/>
+        </p:spPr>
+        <p:style>
+          <a:lnRef idx="1">
+            <a:schemeClr val="accent1"/>
+          </a:lnRef>
+          <a:fillRef idx="3">
+            <a:schemeClr val="accent1"/>
+          </a:fillRef>
+          <a:effectRef idx="2">
+            <a:schemeClr val="accent1"/>
+          </a:effectRef>
+          <a:fontRef idx="minor">
+            <a:schemeClr val="lt1"/>
+          </a:fontRef>
+        </p:style>
+        <p:txBody>
+          <a:bodyPr rtlCol="0" anchor="ctr"/>
+          <a:lstStyle/>
+          <a:p>
+            <a:pPr algn="ctr"/>
+          </a:p>
+        </p:txBody>
+      </p:sp>
+      <p:sp>
+        <p:nvSpPr>
+          <p:cNvPr id="91" name="TextBox 90"/>
+          <p:cNvSpPr txBox="1"/>
+          <p:nvPr/>
+        </p:nvSpPr>
+        <p:spPr>
+          <a:xfrm>
+            <a:off x="8296656" y="5486400"/>
+            <a:ext cx="2225040" cy="152400"/>
+          </a:xfrm>
+          <a:prstGeom prst="rect">
+            <a:avLst/>
+          </a:prstGeom>
+          <a:noFill/>
+        </p:spPr>
+        <p:txBody>
+          <a:bodyPr wrap="square" anchor="t" lIns="0" rIns="0" tIns="0" bIns="0">
+            <a:spAutoFit/>
+          </a:bodyPr>
+          <a:lstStyle/>
+          <a:p>
+            <a:pPr algn="l"/>
+            <a:r>
+              <a:rPr sz="1000" b="0" i="0">
+                <a:solidFill>
+                  <a:srgbClr val="111111"/>
+                </a:solidFill>
+                <a:latin typeface="Arial"/>
+              </a:rPr>
+              <a:t>International et roaming · 4 %</a:t>
+            </a:r>
+          </a:p>
+        </p:txBody>
+      </p:sp>
+      <p:sp>
+        <p:nvSpPr>
+          <p:cNvPr id="92" name="Rectangle 91"/>
+          <p:cNvSpPr/>
+          <p:nvPr/>
+        </p:nvSpPr>
+        <p:spPr>
+          <a:xfrm>
+            <a:off x="8077200" y="5724144"/>
+            <a:ext cx="121920" cy="121920"/>
+          </a:xfrm>
+          <a:prstGeom prst="rect">
+            <a:avLst/>
+          </a:prstGeom>
+          <a:solidFill>
+            <a:srgbClr val="8CB36B"/>
+          </a:solidFill>
+          <a:ln>
+            <a:noFill/>
+          </a:ln>
+          <a:effectLst/>
+        </p:spPr>
+        <p:style>
+          <a:lnRef idx="1">
+            <a:schemeClr val="accent1"/>
+          </a:lnRef>
+          <a:fillRef idx="3">
+            <a:schemeClr val="accent1"/>
+          </a:fillRef>
+          <a:effectRef idx="2">
+            <a:schemeClr val="accent1"/>
+          </a:effectRef>
+          <a:fontRef idx="minor">
+            <a:schemeClr val="lt1"/>
+          </a:fontRef>
+        </p:style>
+        <p:txBody>
+          <a:bodyPr rtlCol="0" anchor="ctr"/>
+          <a:lstStyle/>
+          <a:p>
+            <a:pPr algn="ctr"/>
+          </a:p>
+        </p:txBody>
+      </p:sp>
+      <p:sp>
+        <p:nvSpPr>
+          <p:cNvPr id="93" name="TextBox 92"/>
+          <p:cNvSpPr txBox="1"/>
+          <p:nvPr/>
+        </p:nvSpPr>
+        <p:spPr>
+          <a:xfrm>
+            <a:off x="8296656" y="5705856"/>
+            <a:ext cx="2225040" cy="152400"/>
+          </a:xfrm>
+          <a:prstGeom prst="rect">
+            <a:avLst/>
+          </a:prstGeom>
+          <a:noFill/>
+        </p:spPr>
+        <p:txBody>
+          <a:bodyPr wrap="square" anchor="t" lIns="0" rIns="0" tIns="0" bIns="0">
+            <a:spAutoFit/>
+          </a:bodyPr>
+          <a:lstStyle/>
+          <a:p>
+            <a:pPr algn="l"/>
+            <a:r>
+              <a:rPr sz="1000" b="0" i="0">
+                <a:solidFill>
+                  <a:srgbClr val="111111"/>
+                </a:solidFill>
+                <a:latin typeface="Arial"/>
+              </a:rPr>
+              <a:t>Changement d'opérateur · 1 %</a:t>
+            </a:r>
+          </a:p>
+        </p:txBody>
+      </p:sp>
+      <p:sp>
+        <p:nvSpPr>
+          <p:cNvPr id="94" name="Rectangle 93"/>
+          <p:cNvSpPr/>
+          <p:nvPr/>
+        </p:nvSpPr>
+        <p:spPr>
+          <a:xfrm>
+            <a:off x="8077200" y="5943600"/>
+            <a:ext cx="121920" cy="121920"/>
+          </a:xfrm>
+          <a:prstGeom prst="rect">
+            <a:avLst/>
+          </a:prstGeom>
+          <a:solidFill>
+            <a:srgbClr val="C95B7A"/>
+          </a:solidFill>
+          <a:ln>
+            <a:noFill/>
+          </a:ln>
+          <a:effectLst/>
+        </p:spPr>
+        <p:style>
+          <a:lnRef idx="1">
+            <a:schemeClr val="accent1"/>
+          </a:lnRef>
+          <a:fillRef idx="3">
+            <a:schemeClr val="accent1"/>
+          </a:fillRef>
+          <a:effectRef idx="2">
+            <a:schemeClr val="accent1"/>
+          </a:effectRef>
+          <a:fontRef idx="minor">
+            <a:schemeClr val="lt1"/>
+          </a:fontRef>
+        </p:style>
+        <p:txBody>
+          <a:bodyPr rtlCol="0" anchor="ctr"/>
+          <a:lstStyle/>
+          <a:p>
+            <a:pPr algn="ctr"/>
+          </a:p>
+        </p:txBody>
+      </p:sp>
+      <p:sp>
+        <p:nvSpPr>
+          <p:cNvPr id="95" name="TextBox 94"/>
+          <p:cNvSpPr txBox="1"/>
+          <p:nvPr/>
+        </p:nvSpPr>
+        <p:spPr>
+          <a:xfrm>
+            <a:off x="8296656" y="5925312"/>
+            <a:ext cx="2225040" cy="152400"/>
+          </a:xfrm>
+          <a:prstGeom prst="rect">
+            <a:avLst/>
+          </a:prstGeom>
+          <a:noFill/>
+        </p:spPr>
+        <p:txBody>
+          <a:bodyPr wrap="square" anchor="t" lIns="0" rIns="0" tIns="0" bIns="0">
+            <a:spAutoFit/>
+          </a:bodyPr>
+          <a:lstStyle/>
+          <a:p>
+            <a:pPr algn="l"/>
+            <a:r>
+              <a:rPr sz="1000" b="0" i="0">
+                <a:solidFill>
+                  <a:srgbClr val="111111"/>
+                </a:solidFill>
+                <a:latin typeface="Arial"/>
+              </a:rPr>
+              <a:t>Forfaits par profil · 1 %</a:t>
+            </a:r>
+          </a:p>
+        </p:txBody>
+      </p:sp>
+      <p:sp>
+        <p:nvSpPr>
+          <p:cNvPr id="96" name="Rectangle 95"/>
+          <p:cNvSpPr/>
+          <p:nvPr/>
+        </p:nvSpPr>
+        <p:spPr>
+          <a:xfrm>
             <a:off x="10564368" y="4450080"/>
-            <a:ext cx="475488" cy="1247241"/>
+            <a:ext cx="475488" cy="482803"/>
           </a:xfrm>
           <a:prstGeom prst="rect">
             <a:avLst/>
@@ -6465,14 +6860,14 @@
       </p:sp>
       <p:sp>
         <p:nvSpPr>
-          <p:cNvPr id="87" name="TextBox 86"/>
+          <p:cNvPr id="97" name="TextBox 96"/>
           <p:cNvSpPr txBox="1"/>
           <p:nvPr/>
         </p:nvSpPr>
         <p:spPr>
           <a:xfrm>
             <a:off x="10564368" y="4450080"/>
-            <a:ext cx="475488" cy="1247241"/>
+            <a:ext cx="475488" cy="482803"/>
           </a:xfrm>
           <a:prstGeom prst="rect">
             <a:avLst/>
@@ -6493,21 +6888,21 @@
                 </a:solidFill>
                 <a:latin typeface="Arial"/>
               </a:rPr>
-              <a:t>93 %</a:t>
-            </a:r>
-          </a:p>
-        </p:txBody>
-      </p:sp>
-      <p:sp>
-        <p:nvSpPr>
-          <p:cNvPr id="88" name="Rectangle 87"/>
+              <a:t>36 %</a:t>
+            </a:r>
+          </a:p>
+        </p:txBody>
+      </p:sp>
+      <p:sp>
+        <p:nvSpPr>
+          <p:cNvPr id="98" name="Rectangle 97"/>
           <p:cNvSpPr/>
           <p:nvPr/>
         </p:nvSpPr>
         <p:spPr>
           <a:xfrm>
-            <a:off x="10564368" y="5697321"/>
-            <a:ext cx="475488" cy="80467"/>
+            <a:off x="10564368" y="4932883"/>
+            <a:ext cx="475488" cy="335280"/>
           </a:xfrm>
           <a:prstGeom prst="rect">
             <a:avLst/>
@@ -6544,7 +6939,262 @@
       </p:sp>
       <p:sp>
         <p:nvSpPr>
-          <p:cNvPr id="89" name="Rectangle 88"/>
+          <p:cNvPr id="99" name="TextBox 98"/>
+          <p:cNvSpPr txBox="1"/>
+          <p:nvPr/>
+        </p:nvSpPr>
+        <p:spPr>
+          <a:xfrm>
+            <a:off x="10564368" y="4932883"/>
+            <a:ext cx="475488" cy="335280"/>
+          </a:xfrm>
+          <a:prstGeom prst="rect">
+            <a:avLst/>
+          </a:prstGeom>
+          <a:noFill/>
+        </p:spPr>
+        <p:txBody>
+          <a:bodyPr wrap="square" anchor="ctr" lIns="0" rIns="0" tIns="0" bIns="0">
+            <a:spAutoFit/>
+          </a:bodyPr>
+          <a:lstStyle/>
+          <a:p>
+            <a:pPr algn="ctr"/>
+            <a:r>
+              <a:rPr sz="1000" b="1" i="0">
+                <a:solidFill>
+                  <a:srgbClr val="FFFFFF"/>
+                </a:solidFill>
+                <a:latin typeface="Arial"/>
+              </a:rPr>
+              <a:t>25 %</a:t>
+            </a:r>
+          </a:p>
+        </p:txBody>
+      </p:sp>
+      <p:sp>
+        <p:nvSpPr>
+          <p:cNvPr id="100" name="Rectangle 99"/>
+          <p:cNvSpPr/>
+          <p:nvPr/>
+        </p:nvSpPr>
+        <p:spPr>
+          <a:xfrm>
+            <a:off x="10564368" y="5268163"/>
+            <a:ext cx="475488" cy="201168"/>
+          </a:xfrm>
+          <a:prstGeom prst="rect">
+            <a:avLst/>
+          </a:prstGeom>
+          <a:solidFill>
+            <a:srgbClr val="EB9A5E"/>
+          </a:solidFill>
+          <a:ln>
+            <a:noFill/>
+          </a:ln>
+          <a:effectLst/>
+        </p:spPr>
+        <p:style>
+          <a:lnRef idx="1">
+            <a:schemeClr val="accent1"/>
+          </a:lnRef>
+          <a:fillRef idx="3">
+            <a:schemeClr val="accent1"/>
+          </a:fillRef>
+          <a:effectRef idx="2">
+            <a:schemeClr val="accent1"/>
+          </a:effectRef>
+          <a:fontRef idx="minor">
+            <a:schemeClr val="lt1"/>
+          </a:fontRef>
+        </p:style>
+        <p:txBody>
+          <a:bodyPr rtlCol="0" anchor="ctr"/>
+          <a:lstStyle/>
+          <a:p>
+            <a:pPr algn="ctr"/>
+          </a:p>
+        </p:txBody>
+      </p:sp>
+      <p:sp>
+        <p:nvSpPr>
+          <p:cNvPr id="101" name="Rectangle 100"/>
+          <p:cNvSpPr/>
+          <p:nvPr/>
+        </p:nvSpPr>
+        <p:spPr>
+          <a:xfrm>
+            <a:off x="10564368" y="5469331"/>
+            <a:ext cx="475488" cy="160934"/>
+          </a:xfrm>
+          <a:prstGeom prst="rect">
+            <a:avLst/>
+          </a:prstGeom>
+          <a:solidFill>
+            <a:srgbClr val="EE6A2C"/>
+          </a:solidFill>
+          <a:ln>
+            <a:noFill/>
+          </a:ln>
+          <a:effectLst/>
+        </p:spPr>
+        <p:style>
+          <a:lnRef idx="1">
+            <a:schemeClr val="accent1"/>
+          </a:lnRef>
+          <a:fillRef idx="3">
+            <a:schemeClr val="accent1"/>
+          </a:fillRef>
+          <a:effectRef idx="2">
+            <a:schemeClr val="accent1"/>
+          </a:effectRef>
+          <a:fontRef idx="minor">
+            <a:schemeClr val="lt1"/>
+          </a:fontRef>
+        </p:style>
+        <p:txBody>
+          <a:bodyPr rtlCol="0" anchor="ctr"/>
+          <a:lstStyle/>
+          <a:p>
+            <a:pPr algn="ctr"/>
+          </a:p>
+        </p:txBody>
+      </p:sp>
+      <p:sp>
+        <p:nvSpPr>
+          <p:cNvPr id="102" name="Rectangle 101"/>
+          <p:cNvSpPr/>
+          <p:nvPr/>
+        </p:nvSpPr>
+        <p:spPr>
+          <a:xfrm>
+            <a:off x="10564368" y="5630265"/>
+            <a:ext cx="475488" cy="80467"/>
+          </a:xfrm>
+          <a:prstGeom prst="rect">
+            <a:avLst/>
+          </a:prstGeom>
+          <a:solidFill>
+            <a:srgbClr val="3E5A78"/>
+          </a:solidFill>
+          <a:ln>
+            <a:noFill/>
+          </a:ln>
+          <a:effectLst/>
+        </p:spPr>
+        <p:style>
+          <a:lnRef idx="1">
+            <a:schemeClr val="accent1"/>
+          </a:lnRef>
+          <a:fillRef idx="3">
+            <a:schemeClr val="accent1"/>
+          </a:fillRef>
+          <a:effectRef idx="2">
+            <a:schemeClr val="accent1"/>
+          </a:effectRef>
+          <a:fontRef idx="minor">
+            <a:schemeClr val="lt1"/>
+          </a:fontRef>
+        </p:style>
+        <p:txBody>
+          <a:bodyPr rtlCol="0" anchor="ctr"/>
+          <a:lstStyle/>
+          <a:p>
+            <a:pPr algn="ctr"/>
+          </a:p>
+        </p:txBody>
+      </p:sp>
+      <p:sp>
+        <p:nvSpPr>
+          <p:cNvPr id="103" name="Rectangle 102"/>
+          <p:cNvSpPr/>
+          <p:nvPr/>
+        </p:nvSpPr>
+        <p:spPr>
+          <a:xfrm>
+            <a:off x="10564368" y="5710732"/>
+            <a:ext cx="475488" cy="53644"/>
+          </a:xfrm>
+          <a:prstGeom prst="rect">
+            <a:avLst/>
+          </a:prstGeom>
+          <a:solidFill>
+            <a:srgbClr val="A09278"/>
+          </a:solidFill>
+          <a:ln>
+            <a:noFill/>
+          </a:ln>
+          <a:effectLst/>
+        </p:spPr>
+        <p:style>
+          <a:lnRef idx="1">
+            <a:schemeClr val="accent1"/>
+          </a:lnRef>
+          <a:fillRef idx="3">
+            <a:schemeClr val="accent1"/>
+          </a:fillRef>
+          <a:effectRef idx="2">
+            <a:schemeClr val="accent1"/>
+          </a:effectRef>
+          <a:fontRef idx="minor">
+            <a:schemeClr val="lt1"/>
+          </a:fontRef>
+        </p:style>
+        <p:txBody>
+          <a:bodyPr rtlCol="0" anchor="ctr"/>
+          <a:lstStyle/>
+          <a:p>
+            <a:pPr algn="ctr"/>
+          </a:p>
+        </p:txBody>
+      </p:sp>
+      <p:sp>
+        <p:nvSpPr>
+          <p:cNvPr id="104" name="Rectangle 103"/>
+          <p:cNvSpPr/>
+          <p:nvPr/>
+        </p:nvSpPr>
+        <p:spPr>
+          <a:xfrm>
+            <a:off x="10564368" y="5764377"/>
+            <a:ext cx="475488" cy="13411"/>
+          </a:xfrm>
+          <a:prstGeom prst="rect">
+            <a:avLst/>
+          </a:prstGeom>
+          <a:solidFill>
+            <a:srgbClr val="8CB36B"/>
+          </a:solidFill>
+          <a:ln>
+            <a:noFill/>
+          </a:ln>
+          <a:effectLst/>
+        </p:spPr>
+        <p:style>
+          <a:lnRef idx="1">
+            <a:schemeClr val="accent1"/>
+          </a:lnRef>
+          <a:fillRef idx="3">
+            <a:schemeClr val="accent1"/>
+          </a:fillRef>
+          <a:effectRef idx="2">
+            <a:schemeClr val="accent1"/>
+          </a:effectRef>
+          <a:fontRef idx="minor">
+            <a:schemeClr val="lt1"/>
+          </a:fontRef>
+        </p:style>
+        <p:txBody>
+          <a:bodyPr rtlCol="0" anchor="ctr"/>
+          <a:lstStyle/>
+          <a:p>
+            <a:pPr algn="ctr"/>
+          </a:p>
+        </p:txBody>
+      </p:sp>
+      <p:sp>
+        <p:nvSpPr>
+          <p:cNvPr id="105" name="Rectangle 104"/>
           <p:cNvSpPr/>
           <p:nvPr/>
         </p:nvSpPr>
@@ -6557,7 +7207,7 @@
             <a:avLst/>
           </a:prstGeom>
           <a:solidFill>
-            <a:srgbClr val="EB9A5E"/>
+            <a:srgbClr val="C95B7A"/>
           </a:solidFill>
           <a:ln>
             <a:noFill/>

--- a/rapports/septembre/Cdiscount_Mobile_sept2026.pptx
+++ b/rapports/septembre/Cdiscount_Mobile_sept2026.pptx
@@ -6250,13 +6250,13 @@
           <a:p>
             <a:pPr algn="l"/>
             <a:r>
-              <a:rPr sz="1000" b="0" i="0">
+              <a:rPr sz="800" b="0" i="0">
                 <a:solidFill>
                   <a:srgbClr val="111111"/>
                 </a:solidFill>
                 <a:latin typeface="Arial"/>
               </a:rPr>
-              <a:t>Recherche générale d'un forfait</a:t>
+              <a:t>Recherche générale d'un forfait · &lt; 1 %</a:t>
             </a:r>
           </a:p>
         </p:txBody>
@@ -6335,7 +6335,7 @@
                 </a:solidFill>
                 <a:latin typeface="Arial"/>
               </a:rPr>
-              <a:t>eSIM et carte SIM · 25 %</a:t>
+              <a:t>eSIM et carte SIM · &lt; 1 %</a:t>
             </a:r>
           </a:p>
         </p:txBody>
@@ -6414,7 +6414,7 @@
                 </a:solidFill>
                 <a:latin typeface="Arial"/>
               </a:rPr>
-              <a:t>Prix et sans engagement · 15 %</a:t>
+              <a:t>Prix et sans engagement · 66 %</a:t>
             </a:r>
           </a:p>
         </p:txBody>
@@ -6493,7 +6493,7 @@
                 </a:solidFill>
                 <a:latin typeface="Arial"/>
               </a:rPr>
-              <a:t>Partage de connexion et nomade · 12 %</a:t>
+              <a:t>Partage de connexion et nomade · &lt; 1 %</a:t>
             </a:r>
           </a:p>
         </p:txBody>
@@ -6572,7 +6572,7 @@
                 </a:solidFill>
                 <a:latin typeface="Arial"/>
               </a:rPr>
-              <a:t>5G et volume de data · 6 %</a:t>
+              <a:t>5G et volume de data · 34 %</a:t>
             </a:r>
           </a:p>
         </p:txBody>
@@ -6651,7 +6651,7 @@
                 </a:solidFill>
                 <a:latin typeface="Arial"/>
               </a:rPr>
-              <a:t>International et roaming · 4 %</a:t>
+              <a:t>International et roaming · &lt; 1 %</a:t>
             </a:r>
           </a:p>
         </p:txBody>
@@ -6730,7 +6730,7 @@
                 </a:solidFill>
                 <a:latin typeface="Arial"/>
               </a:rPr>
-              <a:t>Changement d'opérateur · 1 %</a:t>
+              <a:t>Changement d'opérateur · &lt; 1 %</a:t>
             </a:r>
           </a:p>
         </p:txBody>
@@ -6809,7 +6809,7 @@
                 </a:solidFill>
                 <a:latin typeface="Arial"/>
               </a:rPr>
-              <a:t>Forfaits par profil · 1 %</a:t>
+              <a:t>Forfaits par profil · &lt; 1 %</a:t>
             </a:r>
           </a:p>
         </p:txBody>
@@ -6823,7 +6823,7 @@
         <p:spPr>
           <a:xfrm>
             <a:off x="10564368" y="4450080"/>
-            <a:ext cx="475488" cy="482803"/>
+            <a:ext cx="475488" cy="0"/>
           </a:xfrm>
           <a:prstGeom prst="rect">
             <a:avLst/>
@@ -6860,49 +6860,14 @@
       </p:sp>
       <p:sp>
         <p:nvSpPr>
-          <p:cNvPr id="97" name="TextBox 96"/>
-          <p:cNvSpPr txBox="1"/>
+          <p:cNvPr id="97" name="Rectangle 96"/>
+          <p:cNvSpPr/>
           <p:nvPr/>
         </p:nvSpPr>
         <p:spPr>
           <a:xfrm>
             <a:off x="10564368" y="4450080"/>
-            <a:ext cx="475488" cy="482803"/>
-          </a:xfrm>
-          <a:prstGeom prst="rect">
-            <a:avLst/>
-          </a:prstGeom>
-          <a:noFill/>
-        </p:spPr>
-        <p:txBody>
-          <a:bodyPr wrap="square" anchor="ctr" lIns="0" rIns="0" tIns="0" bIns="0">
-            <a:spAutoFit/>
-          </a:bodyPr>
-          <a:lstStyle/>
-          <a:p>
-            <a:pPr algn="ctr"/>
-            <a:r>
-              <a:rPr sz="1000" b="1" i="0">
-                <a:solidFill>
-                  <a:srgbClr val="FFFFFF"/>
-                </a:solidFill>
-                <a:latin typeface="Arial"/>
-              </a:rPr>
-              <a:t>36 %</a:t>
-            </a:r>
-          </a:p>
-        </p:txBody>
-      </p:sp>
-      <p:sp>
-        <p:nvSpPr>
-          <p:cNvPr id="98" name="Rectangle 97"/>
-          <p:cNvSpPr/>
-          <p:nvPr/>
-        </p:nvSpPr>
-        <p:spPr>
-          <a:xfrm>
-            <a:off x="10564368" y="4932883"/>
-            <a:ext cx="475488" cy="335280"/>
+            <a:ext cx="475488" cy="0"/>
           </a:xfrm>
           <a:prstGeom prst="rect">
             <a:avLst/>
@@ -6939,49 +6904,14 @@
       </p:sp>
       <p:sp>
         <p:nvSpPr>
-          <p:cNvPr id="99" name="TextBox 98"/>
-          <p:cNvSpPr txBox="1"/>
-          <p:nvPr/>
-        </p:nvSpPr>
-        <p:spPr>
-          <a:xfrm>
-            <a:off x="10564368" y="4932883"/>
-            <a:ext cx="475488" cy="335280"/>
-          </a:xfrm>
-          <a:prstGeom prst="rect">
-            <a:avLst/>
-          </a:prstGeom>
-          <a:noFill/>
-        </p:spPr>
-        <p:txBody>
-          <a:bodyPr wrap="square" anchor="ctr" lIns="0" rIns="0" tIns="0" bIns="0">
-            <a:spAutoFit/>
-          </a:bodyPr>
-          <a:lstStyle/>
-          <a:p>
-            <a:pPr algn="ctr"/>
-            <a:r>
-              <a:rPr sz="1000" b="1" i="0">
-                <a:solidFill>
-                  <a:srgbClr val="FFFFFF"/>
-                </a:solidFill>
-                <a:latin typeface="Arial"/>
-              </a:rPr>
-              <a:t>25 %</a:t>
-            </a:r>
-          </a:p>
-        </p:txBody>
-      </p:sp>
-      <p:sp>
-        <p:nvSpPr>
-          <p:cNvPr id="100" name="Rectangle 99"/>
+          <p:cNvPr id="98" name="Rectangle 97"/>
           <p:cNvSpPr/>
           <p:nvPr/>
         </p:nvSpPr>
         <p:spPr>
           <a:xfrm>
-            <a:off x="10564368" y="5268163"/>
-            <a:ext cx="475488" cy="201168"/>
+            <a:off x="10564368" y="4450080"/>
+            <a:ext cx="475488" cy="885139"/>
           </a:xfrm>
           <a:prstGeom prst="rect">
             <a:avLst/>
@@ -7018,14 +6948,49 @@
       </p:sp>
       <p:sp>
         <p:nvSpPr>
-          <p:cNvPr id="101" name="Rectangle 100"/>
+          <p:cNvPr id="99" name="TextBox 98"/>
+          <p:cNvSpPr txBox="1"/>
+          <p:nvPr/>
+        </p:nvSpPr>
+        <p:spPr>
+          <a:xfrm>
+            <a:off x="10564368" y="4450080"/>
+            <a:ext cx="475488" cy="885139"/>
+          </a:xfrm>
+          <a:prstGeom prst="rect">
+            <a:avLst/>
+          </a:prstGeom>
+          <a:noFill/>
+        </p:spPr>
+        <p:txBody>
+          <a:bodyPr wrap="square" anchor="ctr" lIns="0" rIns="0" tIns="0" bIns="0">
+            <a:spAutoFit/>
+          </a:bodyPr>
+          <a:lstStyle/>
+          <a:p>
+            <a:pPr algn="ctr"/>
+            <a:r>
+              <a:rPr sz="1000" b="1" i="0">
+                <a:solidFill>
+                  <a:srgbClr val="FFFFFF"/>
+                </a:solidFill>
+                <a:latin typeface="Arial"/>
+              </a:rPr>
+              <a:t>66 %</a:t>
+            </a:r>
+          </a:p>
+        </p:txBody>
+      </p:sp>
+      <p:sp>
+        <p:nvSpPr>
+          <p:cNvPr id="100" name="Rectangle 99"/>
           <p:cNvSpPr/>
           <p:nvPr/>
         </p:nvSpPr>
         <p:spPr>
           <a:xfrm>
-            <a:off x="10564368" y="5469331"/>
-            <a:ext cx="475488" cy="160934"/>
+            <a:off x="10564368" y="5335219"/>
+            <a:ext cx="475488" cy="0"/>
           </a:xfrm>
           <a:prstGeom prst="rect">
             <a:avLst/>
@@ -7062,14 +7027,14 @@
       </p:sp>
       <p:sp>
         <p:nvSpPr>
-          <p:cNvPr id="102" name="Rectangle 101"/>
+          <p:cNvPr id="101" name="Rectangle 100"/>
           <p:cNvSpPr/>
           <p:nvPr/>
         </p:nvSpPr>
         <p:spPr>
           <a:xfrm>
-            <a:off x="10564368" y="5630265"/>
-            <a:ext cx="475488" cy="80467"/>
+            <a:off x="10564368" y="5335219"/>
+            <a:ext cx="475488" cy="455980"/>
           </a:xfrm>
           <a:prstGeom prst="rect">
             <a:avLst/>
@@ -7106,14 +7071,49 @@
       </p:sp>
       <p:sp>
         <p:nvSpPr>
+          <p:cNvPr id="102" name="TextBox 101"/>
+          <p:cNvSpPr txBox="1"/>
+          <p:nvPr/>
+        </p:nvSpPr>
+        <p:spPr>
+          <a:xfrm>
+            <a:off x="10564368" y="5335219"/>
+            <a:ext cx="475488" cy="455980"/>
+          </a:xfrm>
+          <a:prstGeom prst="rect">
+            <a:avLst/>
+          </a:prstGeom>
+          <a:noFill/>
+        </p:spPr>
+        <p:txBody>
+          <a:bodyPr wrap="square" anchor="ctr" lIns="0" rIns="0" tIns="0" bIns="0">
+            <a:spAutoFit/>
+          </a:bodyPr>
+          <a:lstStyle/>
+          <a:p>
+            <a:pPr algn="ctr"/>
+            <a:r>
+              <a:rPr sz="1000" b="1" i="0">
+                <a:solidFill>
+                  <a:srgbClr val="FFFFFF"/>
+                </a:solidFill>
+                <a:latin typeface="Arial"/>
+              </a:rPr>
+              <a:t>34 %</a:t>
+            </a:r>
+          </a:p>
+        </p:txBody>
+      </p:sp>
+      <p:sp>
+        <p:nvSpPr>
           <p:cNvPr id="103" name="Rectangle 102"/>
           <p:cNvSpPr/>
           <p:nvPr/>
         </p:nvSpPr>
         <p:spPr>
           <a:xfrm>
-            <a:off x="10564368" y="5710732"/>
-            <a:ext cx="475488" cy="53644"/>
+            <a:off x="10564368" y="5791200"/>
+            <a:ext cx="475488" cy="0"/>
           </a:xfrm>
           <a:prstGeom prst="rect">
             <a:avLst/>
@@ -7156,8 +7156,8 @@
         </p:nvSpPr>
         <p:spPr>
           <a:xfrm>
-            <a:off x="10564368" y="5764377"/>
-            <a:ext cx="475488" cy="13411"/>
+            <a:off x="10564368" y="5791200"/>
+            <a:ext cx="475488" cy="0"/>
           </a:xfrm>
           <a:prstGeom prst="rect">
             <a:avLst/>
@@ -7200,8 +7200,8 @@
         </p:nvSpPr>
         <p:spPr>
           <a:xfrm>
-            <a:off x="10564368" y="5777788"/>
-            <a:ext cx="475488" cy="13411"/>
+            <a:off x="10564368" y="5791200"/>
+            <a:ext cx="475488" cy="0"/>
           </a:xfrm>
           <a:prstGeom prst="rect">
             <a:avLst/>
@@ -7637,7 +7637,7 @@
                 </a:solidFill>
                 <a:latin typeface="Arial"/>
               </a:rPr>
-              <a:t>Activer le moment « départ en vacances »</a:t>
+              <a:t>Le forfait 40 Go est le plus efficace</a:t>
             </a:r>
           </a:p>
         </p:txBody>
@@ -7672,7 +7672,7 @@
                 </a:solidFill>
                 <a:latin typeface="Arial"/>
               </a:rPr>
-              <a:t>Le départ en vacances déclenche 24,3 % des conversations, avec des recherches de forfait mobile et d'eSIM. L'achat ou le remplacement d'un smartphone en représente plus d'un tiers.</a:t>
+              <a:t>Le forfait 40 Go sans engagement concentre deux tiers de la diffusion et reste au niveau du meilleur CTR (1,02 fois la moyenne).</a:t>
             </a:r>
           </a:p>
         </p:txBody>
@@ -7707,7 +7707,7 @@
                 </a:solidFill>
                 <a:latin typeface="Arial"/>
               </a:rPr>
-              <a:t>→  Pousser les offres forfait + eSIM avant les départs, et l'offre smartphone + forfait sur les moments de remplacement.</a:t>
+              <a:t>→  Garder le 40 Go comme offre d'appel.</a:t>
             </a:r>
           </a:p>
         </p:txBody>
@@ -7823,7 +7823,7 @@
                 </a:solidFill>
                 <a:latin typeface="Arial"/>
               </a:rPr>
-              <a:t>Répondre aux freins avant la souscription</a:t>
+              <a:t>Les trois annonces performent de la même façon</a:t>
             </a:r>
           </a:p>
         </p:txBody>
@@ -7858,7 +7858,7 @@
                 </a:solidFill>
                 <a:latin typeface="Arial"/>
               </a:rPr>
-              <a:t>Doute sur l'utilité (20,6 %), attente d'une promotion (17,9 %), compatibilité (16,7 %), prix (16,5 %) et fiabilité (16,5 %) se partagent les freins exprimés.</a:t>
+              <a:t>Les 3 annonces diffusées sont entre 0,99 et 1,02 fois la moyenne : elles ne permettent pas de tester d'autres messages.</a:t>
             </a:r>
           </a:p>
         </p:txBody>
@@ -7893,7 +7893,7 @@
                 </a:solidFill>
                 <a:latin typeface="Arial"/>
               </a:rPr>
-              <a:t>→  Mettre en avant le prix mensuel, la compatibilité réseau et un argument promo daté pour déclencher la décision.</a:t>
+              <a:t>→  Ajouter des annonces par profil (vacances et eSIM, étudiants, famille) pour trouver de nouveaux leviers.</a:t>
             </a:r>
           </a:p>
         </p:txBody>
@@ -8009,7 +8009,7 @@
                 </a:solidFill>
                 <a:latin typeface="Arial"/>
               </a:rPr>
-              <a:t>Capitaliser sur une marque déjà recommandée</a:t>
+              <a:t>Activer le départ en vacances</a:t>
             </a:r>
           </a:p>
         </p:txBody>
@@ -8044,7 +8044,7 @@
                 </a:solidFill>
                 <a:latin typeface="Arial"/>
               </a:rPr>
-              <a:t>Cdiscount Mobile est 3e en part de voix (11,3 %, +3,6 pts) et 3e des recommandations spontanées des IA (10,7 %), derrière Orange et Amazon. Côté ads : 9,3 % (+7,6 pts).</a:t>
+              <a:t>Le départ en vacances déclenche 24 % des conversations du secteur, avec des recherches de forfait et d'eSIM.</a:t>
             </a:r>
           </a:p>
         </p:txBody>
@@ -8079,7 +8079,7 @@
                 </a:solidFill>
                 <a:latin typeface="Arial"/>
               </a:rPr>
-              <a:t>→  Renforcer la présence ads sur les requêtes forfaits pour passer devant Amazon et Orange.</a:t>
+              <a:t>→  Créer une annonce dédiée à l'eSIM et aux forfaits pour voyager.</a:t>
             </a:r>
           </a:p>
         </p:txBody>
@@ -8230,7 +8230,7 @@
                 </a:solidFill>
                 <a:latin typeface="Arial"/>
               </a:rPr>
-              <a:t>Les clics passent de 2 980 à 9 138 (CTR 0,52 %, +0,31 pt), mais seules 4 conversions sont attribuées, loin de l'objectif de 550 souscriptions.</a:t>
+              <a:t>9 138 clics (+207 %) mais 4 conversions seulement, loin de l'objectif de 550 souscriptions.</a:t>
             </a:r>
           </a:p>
         </p:txBody>
@@ -8265,7 +8265,7 @@
                 </a:solidFill>
                 <a:latin typeface="Arial"/>
               </a:rPr>
-              <a:t>→  Vérifier le tracking Awin et la page d'atterrissage, puis orienter les accroches vers la souscription (prix, sans engagement).</a:t>
+              <a:t>→  Vérifier le tracking Awin et le parcours de souscription.</a:t>
             </a:r>
           </a:p>
         </p:txBody>

--- a/rapports/septembre/Cdiscount_Mobile_sept2026.pptx
+++ b/rapports/septembre/Cdiscount_Mobile_sept2026.pptx
@@ -5283,22 +5283,22 @@
               </a:spcAft>
             </a:pPr>
             <a:r>
+              <a:rPr sz="2000" b="1" i="0">
+                <a:solidFill>
+                  <a:srgbClr val="EE6A2C"/>
+                </a:solidFill>
+                <a:latin typeface="Arial"/>
+              </a:rPr>
+              <a:t>forfait mobile</a:t>
+            </a:r>
+            <a:r>
               <a:rPr sz="1800" b="1" i="0">
                 <a:solidFill>
-                  <a:srgbClr val="EE6A2C"/>
-                </a:solidFill>
-                <a:latin typeface="Arial"/>
-              </a:rPr>
-              <a:t>iPhone 17 Pro</a:t>
-            </a:r>
-            <a:r>
-              <a:rPr sz="1600" b="1" i="0">
-                <a:solidFill>
                   <a:srgbClr val="111111"/>
                 </a:solidFill>
                 <a:latin typeface="Arial"/>
               </a:rPr>
-              <a:t>   Galaxy S26</a:t>
+              <a:t>   sans engagement</a:t>
             </a:r>
           </a:p>
           <a:p>
@@ -5308,22 +5308,22 @@
               </a:spcAft>
             </a:pPr>
             <a:r>
+              <a:rPr sz="1600" b="1" i="0">
+                <a:solidFill>
+                  <a:srgbClr val="555B66"/>
+                </a:solidFill>
+                <a:latin typeface="Arial"/>
+              </a:rPr>
+              <a:t>40 Go</a:t>
+            </a:r>
+            <a:r>
               <a:rPr sz="1500" b="1" i="0">
                 <a:solidFill>
-                  <a:srgbClr val="555B66"/>
-                </a:solidFill>
-                <a:latin typeface="Arial"/>
-              </a:rPr>
-              <a:t>forfait mobile</a:t>
-            </a:r>
-            <a:r>
-              <a:rPr sz="1400" b="1" i="0">
-                <a:solidFill>
                   <a:srgbClr val="111111"/>
                 </a:solidFill>
                 <a:latin typeface="Arial"/>
               </a:rPr>
-              <a:t>   eSIM</a:t>
+              <a:t>   150 Go</a:t>
             </a:r>
           </a:p>
           <a:p>
@@ -5339,7 +5339,7 @@
                 </a:solidFill>
                 <a:latin typeface="Arial"/>
               </a:rPr>
-              <a:t>reconditionné</a:t>
+              <a:t>4G &amp; 5G</a:t>
             </a:r>
             <a:r>
               <a:rPr sz="1200" b="0" i="0">
@@ -5348,7 +5348,7 @@
                 </a:solidFill>
                 <a:latin typeface="Arial"/>
               </a:rPr>
-              <a:t>   Pixel 10</a:t>
+              <a:t>   eSIM</a:t>
             </a:r>
           </a:p>
           <a:p>
@@ -5364,7 +5364,7 @@
                 </a:solidFill>
                 <a:latin typeface="Arial"/>
               </a:rPr>
-              <a:t>Redmi Note 15 Pro</a:t>
+              <a:t>meilleur prix</a:t>
             </a:r>
             <a:r>
               <a:rPr sz="1100" b="1" i="0">
@@ -5373,7 +5373,7 @@
                 </a:solidFill>
                 <a:latin typeface="Arial"/>
               </a:rPr>
-              <a:t>   256 Go</a:t>
+              <a:t>   data</a:t>
             </a:r>
           </a:p>
           <a:p>
@@ -5398,16 +5398,7 @@
                 </a:solidFill>
                 <a:latin typeface="Arial"/>
               </a:rPr>
-              <a:t>   promotion</a:t>
-            </a:r>
-            <a:r>
-              <a:rPr sz="1100" b="1" i="0">
-                <a:solidFill>
-                  <a:srgbClr val="EE6A2C"/>
-                </a:solidFill>
-                <a:latin typeface="Arial"/>
-              </a:rPr>
-              <a:t>   fiabilité</a:t>
+              <a:t>   changement d'opérateur</a:t>
             </a:r>
           </a:p>
           <a:p>
@@ -5423,7 +5414,7 @@
                 </a:solidFill>
                 <a:latin typeface="Arial"/>
               </a:rPr>
-              <a:t>Honor 600</a:t>
+              <a:t>promotion</a:t>
             </a:r>
             <a:r>
               <a:rPr sz="1100" b="0" i="0">
@@ -5616,470 +5607,14 @@
                 </a:solidFill>
                 <a:latin typeface="Arial"/>
               </a:rPr>
-              <a:t>Montre-moi les smartphones Android 256 Go sous 500 €</a:t>
-            </a:r>
-          </a:p>
-        </p:txBody>
-      </p:sp>
-      <p:sp>
-        <p:nvSpPr>
-          <p:cNvPr id="65" name="Rectangle 64"/>
-          <p:cNvSpPr/>
-          <p:nvPr/>
-        </p:nvSpPr>
-        <p:spPr>
-          <a:xfrm>
-            <a:off x="4437888" y="4632960"/>
-            <a:ext cx="2913888" cy="304800"/>
-          </a:xfrm>
-          <a:prstGeom prst="rect">
-            <a:avLst/>
-          </a:prstGeom>
-          <a:solidFill>
-            <a:srgbClr val="F1EFEA"/>
-          </a:solidFill>
-          <a:ln>
-            <a:noFill/>
-          </a:ln>
-          <a:effectLst/>
-        </p:spPr>
-        <p:style>
-          <a:lnRef idx="1">
-            <a:schemeClr val="accent1"/>
-          </a:lnRef>
-          <a:fillRef idx="3">
-            <a:schemeClr val="accent1"/>
-          </a:fillRef>
-          <a:effectRef idx="2">
-            <a:schemeClr val="accent1"/>
-          </a:effectRef>
-          <a:fontRef idx="minor">
-            <a:schemeClr val="lt1"/>
-          </a:fontRef>
-        </p:style>
-        <p:txBody>
-          <a:bodyPr rtlCol="0" anchor="ctr"/>
-          <a:lstStyle/>
-          <a:p>
-            <a:pPr algn="ctr"/>
-          </a:p>
-        </p:txBody>
-      </p:sp>
-      <p:sp>
-        <p:nvSpPr>
-          <p:cNvPr id="66" name="TextBox 65"/>
-          <p:cNvSpPr txBox="1"/>
-          <p:nvPr/>
-        </p:nvSpPr>
-        <p:spPr>
-          <a:xfrm>
-            <a:off x="4559808" y="4632960"/>
-            <a:ext cx="182880" cy="304800"/>
-          </a:xfrm>
-          <a:prstGeom prst="rect">
-            <a:avLst/>
-          </a:prstGeom>
-          <a:noFill/>
-        </p:spPr>
-        <p:txBody>
-          <a:bodyPr wrap="square" anchor="ctr" lIns="0" rIns="0" tIns="0" bIns="0">
-            <a:spAutoFit/>
-          </a:bodyPr>
-          <a:lstStyle/>
-          <a:p>
-            <a:pPr algn="l"/>
-            <a:r>
-              <a:rPr sz="900" b="0" i="0">
-                <a:solidFill>
-                  <a:srgbClr val="555B66"/>
-                </a:solidFill>
-                <a:latin typeface="Arial"/>
-              </a:rPr>
-              <a:t>🔍</a:t>
-            </a:r>
-          </a:p>
-        </p:txBody>
-      </p:sp>
-      <p:sp>
-        <p:nvSpPr>
-          <p:cNvPr id="67" name="TextBox 66"/>
-          <p:cNvSpPr txBox="1"/>
-          <p:nvPr/>
-        </p:nvSpPr>
-        <p:spPr>
-          <a:xfrm>
-            <a:off x="4791456" y="4632960"/>
-            <a:ext cx="2499360" cy="304800"/>
-          </a:xfrm>
-          <a:prstGeom prst="rect">
-            <a:avLst/>
-          </a:prstGeom>
-          <a:noFill/>
-        </p:spPr>
-        <p:txBody>
-          <a:bodyPr wrap="square" anchor="ctr" lIns="0" rIns="0" tIns="0" bIns="0">
-            <a:spAutoFit/>
-          </a:bodyPr>
-          <a:lstStyle/>
-          <a:p>
-            <a:pPr algn="l"/>
-            <a:r>
-              <a:rPr sz="900" b="0" i="0">
-                <a:solidFill>
-                  <a:srgbClr val="111111"/>
-                </a:solidFill>
-                <a:latin typeface="Arial"/>
-              </a:rPr>
-              <a:t>Je recherche un smartphone microSD pour la photo</a:t>
-            </a:r>
-          </a:p>
-        </p:txBody>
-      </p:sp>
-      <p:sp>
-        <p:nvSpPr>
-          <p:cNvPr id="68" name="Rectangle 67"/>
-          <p:cNvSpPr/>
-          <p:nvPr/>
-        </p:nvSpPr>
-        <p:spPr>
-          <a:xfrm>
-            <a:off x="4437888" y="4998720"/>
-            <a:ext cx="2913888" cy="304800"/>
-          </a:xfrm>
-          <a:prstGeom prst="rect">
-            <a:avLst/>
-          </a:prstGeom>
-          <a:solidFill>
-            <a:srgbClr val="F1EFEA"/>
-          </a:solidFill>
-          <a:ln>
-            <a:noFill/>
-          </a:ln>
-          <a:effectLst/>
-        </p:spPr>
-        <p:style>
-          <a:lnRef idx="1">
-            <a:schemeClr val="accent1"/>
-          </a:lnRef>
-          <a:fillRef idx="3">
-            <a:schemeClr val="accent1"/>
-          </a:fillRef>
-          <a:effectRef idx="2">
-            <a:schemeClr val="accent1"/>
-          </a:effectRef>
-          <a:fontRef idx="minor">
-            <a:schemeClr val="lt1"/>
-          </a:fontRef>
-        </p:style>
-        <p:txBody>
-          <a:bodyPr rtlCol="0" anchor="ctr"/>
-          <a:lstStyle/>
-          <a:p>
-            <a:pPr algn="ctr"/>
-          </a:p>
-        </p:txBody>
-      </p:sp>
-      <p:sp>
-        <p:nvSpPr>
-          <p:cNvPr id="69" name="TextBox 68"/>
-          <p:cNvSpPr txBox="1"/>
-          <p:nvPr/>
-        </p:nvSpPr>
-        <p:spPr>
-          <a:xfrm>
-            <a:off x="4559808" y="4998720"/>
-            <a:ext cx="182880" cy="304800"/>
-          </a:xfrm>
-          <a:prstGeom prst="rect">
-            <a:avLst/>
-          </a:prstGeom>
-          <a:noFill/>
-        </p:spPr>
-        <p:txBody>
-          <a:bodyPr wrap="square" anchor="ctr" lIns="0" rIns="0" tIns="0" bIns="0">
-            <a:spAutoFit/>
-          </a:bodyPr>
-          <a:lstStyle/>
-          <a:p>
-            <a:pPr algn="l"/>
-            <a:r>
-              <a:rPr sz="900" b="0" i="0">
-                <a:solidFill>
-                  <a:srgbClr val="555B66"/>
-                </a:solidFill>
-                <a:latin typeface="Arial"/>
-              </a:rPr>
-              <a:t>🔍</a:t>
-            </a:r>
-          </a:p>
-        </p:txBody>
-      </p:sp>
-      <p:sp>
-        <p:nvSpPr>
-          <p:cNvPr id="70" name="TextBox 69"/>
-          <p:cNvSpPr txBox="1"/>
-          <p:nvPr/>
-        </p:nvSpPr>
-        <p:spPr>
-          <a:xfrm>
-            <a:off x="4791456" y="4998720"/>
-            <a:ext cx="2499360" cy="304800"/>
-          </a:xfrm>
-          <a:prstGeom prst="rect">
-            <a:avLst/>
-          </a:prstGeom>
-          <a:noFill/>
-        </p:spPr>
-        <p:txBody>
-          <a:bodyPr wrap="square" anchor="ctr" lIns="0" rIns="0" tIns="0" bIns="0">
-            <a:spAutoFit/>
-          </a:bodyPr>
-          <a:lstStyle/>
-          <a:p>
-            <a:pPr algn="l"/>
-            <a:r>
-              <a:rPr sz="900" b="0" i="0">
-                <a:solidFill>
-                  <a:srgbClr val="111111"/>
-                </a:solidFill>
-                <a:latin typeface="Arial"/>
-              </a:rPr>
-              <a:t>Comment je sais si un iPhone 15 reconditionné est fiable ?</a:t>
-            </a:r>
-          </a:p>
-        </p:txBody>
-      </p:sp>
-      <p:sp>
-        <p:nvSpPr>
-          <p:cNvPr id="71" name="Rectangle 70"/>
-          <p:cNvSpPr/>
-          <p:nvPr/>
-        </p:nvSpPr>
-        <p:spPr>
-          <a:xfrm>
-            <a:off x="4437888" y="5364480"/>
-            <a:ext cx="2913888" cy="304800"/>
-          </a:xfrm>
-          <a:prstGeom prst="rect">
-            <a:avLst/>
-          </a:prstGeom>
-          <a:solidFill>
-            <a:srgbClr val="F1EFEA"/>
-          </a:solidFill>
-          <a:ln>
-            <a:noFill/>
-          </a:ln>
-          <a:effectLst/>
-        </p:spPr>
-        <p:style>
-          <a:lnRef idx="1">
-            <a:schemeClr val="accent1"/>
-          </a:lnRef>
-          <a:fillRef idx="3">
-            <a:schemeClr val="accent1"/>
-          </a:fillRef>
-          <a:effectRef idx="2">
-            <a:schemeClr val="accent1"/>
-          </a:effectRef>
-          <a:fontRef idx="minor">
-            <a:schemeClr val="lt1"/>
-          </a:fontRef>
-        </p:style>
-        <p:txBody>
-          <a:bodyPr rtlCol="0" anchor="ctr"/>
-          <a:lstStyle/>
-          <a:p>
-            <a:pPr algn="ctr"/>
-          </a:p>
-        </p:txBody>
-      </p:sp>
-      <p:sp>
-        <p:nvSpPr>
-          <p:cNvPr id="72" name="TextBox 71"/>
-          <p:cNvSpPr txBox="1"/>
-          <p:nvPr/>
-        </p:nvSpPr>
-        <p:spPr>
-          <a:xfrm>
-            <a:off x="4559808" y="5364480"/>
-            <a:ext cx="182880" cy="304800"/>
-          </a:xfrm>
-          <a:prstGeom prst="rect">
-            <a:avLst/>
-          </a:prstGeom>
-          <a:noFill/>
-        </p:spPr>
-        <p:txBody>
-          <a:bodyPr wrap="square" anchor="ctr" lIns="0" rIns="0" tIns="0" bIns="0">
-            <a:spAutoFit/>
-          </a:bodyPr>
-          <a:lstStyle/>
-          <a:p>
-            <a:pPr algn="l"/>
-            <a:r>
-              <a:rPr sz="900" b="0" i="0">
-                <a:solidFill>
-                  <a:srgbClr val="555B66"/>
-                </a:solidFill>
-                <a:latin typeface="Arial"/>
-              </a:rPr>
-              <a:t>🔍</a:t>
-            </a:r>
-          </a:p>
-        </p:txBody>
-      </p:sp>
-      <p:sp>
-        <p:nvSpPr>
-          <p:cNvPr id="73" name="TextBox 72"/>
-          <p:cNvSpPr txBox="1"/>
-          <p:nvPr/>
-        </p:nvSpPr>
-        <p:spPr>
-          <a:xfrm>
-            <a:off x="4791456" y="5364480"/>
-            <a:ext cx="2499360" cy="304800"/>
-          </a:xfrm>
-          <a:prstGeom prst="rect">
-            <a:avLst/>
-          </a:prstGeom>
-          <a:noFill/>
-        </p:spPr>
-        <p:txBody>
-          <a:bodyPr wrap="square" anchor="ctr" lIns="0" rIns="0" tIns="0" bIns="0">
-            <a:spAutoFit/>
-          </a:bodyPr>
-          <a:lstStyle/>
-          <a:p>
-            <a:pPr algn="l"/>
-            <a:r>
-              <a:rPr sz="900" b="0" i="0">
-                <a:solidFill>
-                  <a:srgbClr val="111111"/>
-                </a:solidFill>
-                <a:latin typeface="Arial"/>
-              </a:rPr>
-              <a:t>Les Honor vendus en Europe ont-ils bien les services Google ?</a:t>
-            </a:r>
-          </a:p>
-        </p:txBody>
-      </p:sp>
-      <p:sp>
-        <p:nvSpPr>
-          <p:cNvPr id="74" name="Rectangle 73"/>
-          <p:cNvSpPr/>
-          <p:nvPr/>
-        </p:nvSpPr>
-        <p:spPr>
-          <a:xfrm>
-            <a:off x="4437888" y="5730240"/>
-            <a:ext cx="2913888" cy="304800"/>
-          </a:xfrm>
-          <a:prstGeom prst="rect">
-            <a:avLst/>
-          </a:prstGeom>
-          <a:solidFill>
-            <a:srgbClr val="F1EFEA"/>
-          </a:solidFill>
-          <a:ln>
-            <a:noFill/>
-          </a:ln>
-          <a:effectLst/>
-        </p:spPr>
-        <p:style>
-          <a:lnRef idx="1">
-            <a:schemeClr val="accent1"/>
-          </a:lnRef>
-          <a:fillRef idx="3">
-            <a:schemeClr val="accent1"/>
-          </a:fillRef>
-          <a:effectRef idx="2">
-            <a:schemeClr val="accent1"/>
-          </a:effectRef>
-          <a:fontRef idx="minor">
-            <a:schemeClr val="lt1"/>
-          </a:fontRef>
-        </p:style>
-        <p:txBody>
-          <a:bodyPr rtlCol="0" anchor="ctr"/>
-          <a:lstStyle/>
-          <a:p>
-            <a:pPr algn="ctr"/>
-          </a:p>
-        </p:txBody>
-      </p:sp>
-      <p:sp>
-        <p:nvSpPr>
-          <p:cNvPr id="75" name="TextBox 74"/>
-          <p:cNvSpPr txBox="1"/>
-          <p:nvPr/>
-        </p:nvSpPr>
-        <p:spPr>
-          <a:xfrm>
-            <a:off x="4559808" y="5730240"/>
-            <a:ext cx="182880" cy="304800"/>
-          </a:xfrm>
-          <a:prstGeom prst="rect">
-            <a:avLst/>
-          </a:prstGeom>
-          <a:noFill/>
-        </p:spPr>
-        <p:txBody>
-          <a:bodyPr wrap="square" anchor="ctr" lIns="0" rIns="0" tIns="0" bIns="0">
-            <a:spAutoFit/>
-          </a:bodyPr>
-          <a:lstStyle/>
-          <a:p>
-            <a:pPr algn="l"/>
-            <a:r>
-              <a:rPr sz="900" b="0" i="0">
-                <a:solidFill>
-                  <a:srgbClr val="555B66"/>
-                </a:solidFill>
-                <a:latin typeface="Arial"/>
-              </a:rPr>
-              <a:t>🔍</a:t>
-            </a:r>
-          </a:p>
-        </p:txBody>
-      </p:sp>
-      <p:sp>
-        <p:nvSpPr>
-          <p:cNvPr id="76" name="TextBox 75"/>
-          <p:cNvSpPr txBox="1"/>
-          <p:nvPr/>
-        </p:nvSpPr>
-        <p:spPr>
-          <a:xfrm>
-            <a:off x="4791456" y="5730240"/>
-            <a:ext cx="2499360" cy="304800"/>
-          </a:xfrm>
-          <a:prstGeom prst="rect">
-            <a:avLst/>
-          </a:prstGeom>
-          <a:noFill/>
-        </p:spPr>
-        <p:txBody>
-          <a:bodyPr wrap="square" anchor="ctr" lIns="0" rIns="0" tIns="0" bIns="0">
-            <a:spAutoFit/>
-          </a:bodyPr>
-          <a:lstStyle/>
-          <a:p>
-            <a:pPr algn="l"/>
-            <a:r>
-              <a:rPr sz="900" b="0" i="0">
-                <a:solidFill>
-                  <a:srgbClr val="111111"/>
-                </a:solidFill>
-                <a:latin typeface="Arial"/>
-              </a:rPr>
-              <a:t>Ça vaut le coup de changer de smartphone juste pour WhatsApp ?</a:t>
-            </a:r>
-          </a:p>
-        </p:txBody>
-      </p:sp>
-      <p:sp>
-        <p:nvSpPr>
-          <p:cNvPr id="77" name="TextBox 76"/>
+              <a:t>À compléter : le rapport d'insights porte surtout sur les smartphones, pas sur les forfaits</a:t>
+            </a:r>
+          </a:p>
+        </p:txBody>
+      </p:sp>
+      <p:sp>
+        <p:nvSpPr>
+          <p:cNvPr id="65" name="TextBox 64"/>
           <p:cNvSpPr txBox="1"/>
           <p:nvPr/>
         </p:nvSpPr>
@@ -6114,7 +5649,7 @@
       </p:sp>
       <p:sp>
         <p:nvSpPr>
-          <p:cNvPr id="78" name="TextBox 77"/>
+          <p:cNvPr id="66" name="TextBox 65"/>
           <p:cNvSpPr txBox="1"/>
           <p:nvPr/>
         </p:nvSpPr>
@@ -6149,7 +5684,7 @@
       </p:sp>
       <p:sp>
         <p:nvSpPr>
-          <p:cNvPr id="79" name="TextBox 78"/>
+          <p:cNvPr id="67" name="TextBox 66"/>
           <p:cNvSpPr txBox="1"/>
           <p:nvPr/>
         </p:nvSpPr>
@@ -6184,7 +5719,7 @@
       </p:sp>
       <p:sp>
         <p:nvSpPr>
-          <p:cNvPr id="80" name="Rectangle 79"/>
+          <p:cNvPr id="68" name="Rectangle 67"/>
           <p:cNvSpPr/>
           <p:nvPr/>
         </p:nvSpPr>
@@ -6228,7 +5763,7 @@
       </p:sp>
       <p:sp>
         <p:nvSpPr>
-          <p:cNvPr id="81" name="TextBox 80"/>
+          <p:cNvPr id="69" name="TextBox 68"/>
           <p:cNvSpPr txBox="1"/>
           <p:nvPr/>
         </p:nvSpPr>
@@ -6263,7 +5798,7 @@
       </p:sp>
       <p:sp>
         <p:nvSpPr>
-          <p:cNvPr id="82" name="Rectangle 81"/>
+          <p:cNvPr id="70" name="Rectangle 69"/>
           <p:cNvSpPr/>
           <p:nvPr/>
         </p:nvSpPr>
@@ -6307,7 +5842,7 @@
       </p:sp>
       <p:sp>
         <p:nvSpPr>
-          <p:cNvPr id="83" name="TextBox 82"/>
+          <p:cNvPr id="71" name="TextBox 70"/>
           <p:cNvSpPr txBox="1"/>
           <p:nvPr/>
         </p:nvSpPr>
@@ -6342,7 +5877,7 @@
       </p:sp>
       <p:sp>
         <p:nvSpPr>
-          <p:cNvPr id="84" name="Rectangle 83"/>
+          <p:cNvPr id="72" name="Rectangle 71"/>
           <p:cNvSpPr/>
           <p:nvPr/>
         </p:nvSpPr>
@@ -6386,7 +5921,7 @@
       </p:sp>
       <p:sp>
         <p:nvSpPr>
-          <p:cNvPr id="85" name="TextBox 84"/>
+          <p:cNvPr id="73" name="TextBox 72"/>
           <p:cNvSpPr txBox="1"/>
           <p:nvPr/>
         </p:nvSpPr>
@@ -6421,7 +5956,7 @@
       </p:sp>
       <p:sp>
         <p:nvSpPr>
-          <p:cNvPr id="86" name="Rectangle 85"/>
+          <p:cNvPr id="74" name="Rectangle 73"/>
           <p:cNvSpPr/>
           <p:nvPr/>
         </p:nvSpPr>
@@ -6465,7 +6000,7 @@
       </p:sp>
       <p:sp>
         <p:nvSpPr>
-          <p:cNvPr id="87" name="TextBox 86"/>
+          <p:cNvPr id="75" name="TextBox 74"/>
           <p:cNvSpPr txBox="1"/>
           <p:nvPr/>
         </p:nvSpPr>
@@ -6500,7 +6035,7 @@
       </p:sp>
       <p:sp>
         <p:nvSpPr>
-          <p:cNvPr id="88" name="Rectangle 87"/>
+          <p:cNvPr id="76" name="Rectangle 75"/>
           <p:cNvSpPr/>
           <p:nvPr/>
         </p:nvSpPr>
@@ -6544,7 +6079,7 @@
       </p:sp>
       <p:sp>
         <p:nvSpPr>
-          <p:cNvPr id="89" name="TextBox 88"/>
+          <p:cNvPr id="77" name="TextBox 76"/>
           <p:cNvSpPr txBox="1"/>
           <p:nvPr/>
         </p:nvSpPr>
@@ -6579,7 +6114,7 @@
       </p:sp>
       <p:sp>
         <p:nvSpPr>
-          <p:cNvPr id="90" name="Rectangle 89"/>
+          <p:cNvPr id="78" name="Rectangle 77"/>
           <p:cNvSpPr/>
           <p:nvPr/>
         </p:nvSpPr>
@@ -6623,7 +6158,7 @@
       </p:sp>
       <p:sp>
         <p:nvSpPr>
-          <p:cNvPr id="91" name="TextBox 90"/>
+          <p:cNvPr id="79" name="TextBox 78"/>
           <p:cNvSpPr txBox="1"/>
           <p:nvPr/>
         </p:nvSpPr>
@@ -6658,7 +6193,7 @@
       </p:sp>
       <p:sp>
         <p:nvSpPr>
-          <p:cNvPr id="92" name="Rectangle 91"/>
+          <p:cNvPr id="80" name="Rectangle 79"/>
           <p:cNvSpPr/>
           <p:nvPr/>
         </p:nvSpPr>
@@ -6702,7 +6237,7 @@
       </p:sp>
       <p:sp>
         <p:nvSpPr>
-          <p:cNvPr id="93" name="TextBox 92"/>
+          <p:cNvPr id="81" name="TextBox 80"/>
           <p:cNvSpPr txBox="1"/>
           <p:nvPr/>
         </p:nvSpPr>
@@ -6737,7 +6272,7 @@
       </p:sp>
       <p:sp>
         <p:nvSpPr>
-          <p:cNvPr id="94" name="Rectangle 93"/>
+          <p:cNvPr id="82" name="Rectangle 81"/>
           <p:cNvSpPr/>
           <p:nvPr/>
         </p:nvSpPr>
@@ -6781,7 +6316,7 @@
       </p:sp>
       <p:sp>
         <p:nvSpPr>
-          <p:cNvPr id="95" name="TextBox 94"/>
+          <p:cNvPr id="83" name="TextBox 82"/>
           <p:cNvSpPr txBox="1"/>
           <p:nvPr/>
         </p:nvSpPr>
@@ -6816,7 +6351,7 @@
       </p:sp>
       <p:sp>
         <p:nvSpPr>
-          <p:cNvPr id="96" name="Rectangle 95"/>
+          <p:cNvPr id="84" name="Rectangle 83"/>
           <p:cNvSpPr/>
           <p:nvPr/>
         </p:nvSpPr>
@@ -6860,7 +6395,7 @@
       </p:sp>
       <p:sp>
         <p:nvSpPr>
-          <p:cNvPr id="97" name="Rectangle 96"/>
+          <p:cNvPr id="85" name="Rectangle 84"/>
           <p:cNvSpPr/>
           <p:nvPr/>
         </p:nvSpPr>
@@ -6904,7 +6439,7 @@
       </p:sp>
       <p:sp>
         <p:nvSpPr>
-          <p:cNvPr id="98" name="Rectangle 97"/>
+          <p:cNvPr id="86" name="Rectangle 85"/>
           <p:cNvSpPr/>
           <p:nvPr/>
         </p:nvSpPr>
@@ -6948,7 +6483,7 @@
       </p:sp>
       <p:sp>
         <p:nvSpPr>
-          <p:cNvPr id="99" name="TextBox 98"/>
+          <p:cNvPr id="87" name="TextBox 86"/>
           <p:cNvSpPr txBox="1"/>
           <p:nvPr/>
         </p:nvSpPr>
@@ -6983,7 +6518,7 @@
       </p:sp>
       <p:sp>
         <p:nvSpPr>
-          <p:cNvPr id="100" name="Rectangle 99"/>
+          <p:cNvPr id="88" name="Rectangle 87"/>
           <p:cNvSpPr/>
           <p:nvPr/>
         </p:nvSpPr>
@@ -7027,7 +6562,7 @@
       </p:sp>
       <p:sp>
         <p:nvSpPr>
-          <p:cNvPr id="101" name="Rectangle 100"/>
+          <p:cNvPr id="89" name="Rectangle 88"/>
           <p:cNvSpPr/>
           <p:nvPr/>
         </p:nvSpPr>
@@ -7071,7 +6606,7 @@
       </p:sp>
       <p:sp>
         <p:nvSpPr>
-          <p:cNvPr id="102" name="TextBox 101"/>
+          <p:cNvPr id="90" name="TextBox 89"/>
           <p:cNvSpPr txBox="1"/>
           <p:nvPr/>
         </p:nvSpPr>
@@ -7106,7 +6641,7 @@
       </p:sp>
       <p:sp>
         <p:nvSpPr>
-          <p:cNvPr id="103" name="Rectangle 102"/>
+          <p:cNvPr id="91" name="Rectangle 90"/>
           <p:cNvSpPr/>
           <p:nvPr/>
         </p:nvSpPr>
@@ -7150,7 +6685,7 @@
       </p:sp>
       <p:sp>
         <p:nvSpPr>
-          <p:cNvPr id="104" name="Rectangle 103"/>
+          <p:cNvPr id="92" name="Rectangle 91"/>
           <p:cNvSpPr/>
           <p:nvPr/>
         </p:nvSpPr>
@@ -7194,7 +6729,7 @@
       </p:sp>
       <p:sp>
         <p:nvSpPr>
-          <p:cNvPr id="105" name="Rectangle 104"/>
+          <p:cNvPr id="93" name="Rectangle 92"/>
           <p:cNvSpPr/>
           <p:nvPr/>
         </p:nvSpPr>
@@ -7637,7 +7172,7 @@
                 </a:solidFill>
                 <a:latin typeface="Arial"/>
               </a:rPr>
-              <a:t>Le forfait 40 Go est le plus efficace</a:t>
+              <a:t>Les forfaits 40 Go et 150 Go font jeu égal</a:t>
             </a:r>
           </a:p>
         </p:txBody>
@@ -7672,7 +7207,7 @@
                 </a:solidFill>
                 <a:latin typeface="Arial"/>
               </a:rPr>
-              <a:t>Le forfait 40 Go sans engagement concentre deux tiers de la diffusion et reste au niveau du meilleur CTR (1,02 fois la moyenne).</a:t>
+              <a:t>Le forfait 40 Go (deux tiers de la diffusion) et le forfait 150 Go obtiennent le même CTR (0,99 à 1,02 fois la moyenne).</a:t>
             </a:r>
           </a:p>
         </p:txBody>
@@ -7707,7 +7242,7 @@
                 </a:solidFill>
                 <a:latin typeface="Arial"/>
               </a:rPr>
-              <a:t>→  Garder le 40 Go comme offre d'appel.</a:t>
+              <a:t>→  Garder le 40 Go comme offre d'appel, au prix le plus bas.</a:t>
             </a:r>
           </a:p>
         </p:txBody>

--- a/rapports/septembre/Cdiscount_Mobile_sept2026.pptx
+++ b/rapports/septembre/Cdiscount_Mobile_sept2026.pptx
@@ -5291,15 +5291,6 @@
               </a:rPr>
               <a:t>forfait mobile</a:t>
             </a:r>
-            <a:r>
-              <a:rPr sz="1800" b="1" i="0">
-                <a:solidFill>
-                  <a:srgbClr val="111111"/>
-                </a:solidFill>
-                <a:latin typeface="Arial"/>
-              </a:rPr>
-              <a:t>   sans engagement</a:t>
-            </a:r>
           </a:p>
           <a:p>
             <a:pPr algn="l">
@@ -5308,22 +5299,22 @@
               </a:spcAft>
             </a:pPr>
             <a:r>
-              <a:rPr sz="1600" b="1" i="0">
+              <a:rPr sz="1700" b="1" i="0">
+                <a:solidFill>
+                  <a:srgbClr val="111111"/>
+                </a:solidFill>
+                <a:latin typeface="Arial"/>
+              </a:rPr>
+              <a:t>sans engagement</a:t>
+            </a:r>
+            <a:r>
+              <a:rPr sz="1500" b="0" i="0">
                 <a:solidFill>
                   <a:srgbClr val="555B66"/>
                 </a:solidFill>
                 <a:latin typeface="Arial"/>
               </a:rPr>
-              <a:t>40 Go</a:t>
-            </a:r>
-            <a:r>
-              <a:rPr sz="1500" b="1" i="0">
-                <a:solidFill>
-                  <a:srgbClr val="111111"/>
-                </a:solidFill>
-                <a:latin typeface="Arial"/>
-              </a:rPr>
-              <a:t>   150 Go</a:t>
+              <a:t>      eSIM</a:t>
             </a:r>
           </a:p>
           <a:p>
@@ -5333,22 +5324,31 @@
               </a:spcAft>
             </a:pPr>
             <a:r>
+              <a:rPr sz="1400" b="1" i="0">
+                <a:solidFill>
+                  <a:srgbClr val="EE6A2C"/>
+                </a:solidFill>
+                <a:latin typeface="Arial"/>
+              </a:rPr>
+              <a:t>40 Go</a:t>
+            </a:r>
+            <a:r>
               <a:rPr sz="1300" b="1" i="0">
                 <a:solidFill>
-                  <a:srgbClr val="EE6A2C"/>
-                </a:solidFill>
-                <a:latin typeface="Arial"/>
-              </a:rPr>
-              <a:t>4G &amp; 5G</a:t>
-            </a:r>
-            <a:r>
-              <a:rPr sz="1200" b="0" i="0">
+                  <a:srgbClr val="111111"/>
+                </a:solidFill>
+                <a:latin typeface="Arial"/>
+              </a:rPr>
+              <a:t>   150 Go</a:t>
+            </a:r>
+            <a:r>
+              <a:rPr sz="1300" b="0" i="0">
                 <a:solidFill>
                   <a:srgbClr val="555B66"/>
                 </a:solidFill>
                 <a:latin typeface="Arial"/>
               </a:rPr>
-              <a:t>   eSIM</a:t>
+              <a:t>   5G</a:t>
             </a:r>
           </a:p>
           <a:p>
@@ -5364,7 +5364,7 @@
                 </a:solidFill>
                 <a:latin typeface="Arial"/>
               </a:rPr>
-              <a:t>meilleur prix</a:t>
+              <a:t>carte SIM</a:t>
             </a:r>
             <a:r>
               <a:rPr sz="1100" b="1" i="0">
@@ -5373,7 +5373,16 @@
                 </a:solidFill>
                 <a:latin typeface="Arial"/>
               </a:rPr>
-              <a:t>   data</a:t>
+              <a:t>   code RIO</a:t>
+            </a:r>
+            <a:r>
+              <a:rPr sz="1100" b="0" i="0">
+                <a:solidFill>
+                  <a:srgbClr val="555B66"/>
+                </a:solidFill>
+                <a:latin typeface="Arial"/>
+              </a:rPr>
+              <a:t>   portabilité</a:t>
             </a:r>
           </a:p>
           <a:p>
@@ -5385,20 +5394,20 @@
             <a:r>
               <a:rPr sz="1100" b="1" i="0">
                 <a:solidFill>
+                  <a:srgbClr val="EE6A2C"/>
+                </a:solidFill>
+                <a:latin typeface="Arial"/>
+              </a:rPr>
+              <a:t>activation immédiate</a:t>
+            </a:r>
+            <a:r>
+              <a:rPr sz="1100" b="1" i="0">
+                <a:solidFill>
                   <a:srgbClr val="111111"/>
                 </a:solidFill>
                 <a:latin typeface="Arial"/>
               </a:rPr>
-              <a:t>départ en vacances</a:t>
-            </a:r>
-            <a:r>
-              <a:rPr sz="1100" b="0" i="0">
-                <a:solidFill>
-                  <a:srgbClr val="555B66"/>
-                </a:solidFill>
-                <a:latin typeface="Arial"/>
-              </a:rPr>
-              <a:t>   changement d'opérateur</a:t>
+              <a:t>   partage de connexion</a:t>
             </a:r>
           </a:p>
           <a:p>
@@ -5414,7 +5423,7 @@
                 </a:solidFill>
                 <a:latin typeface="Arial"/>
               </a:rPr>
-              <a:t>promotion</a:t>
+              <a:t>roaming</a:t>
             </a:r>
             <a:r>
               <a:rPr sz="1100" b="0" i="0">
@@ -5423,7 +5432,16 @@
                 </a:solidFill>
                 <a:latin typeface="Arial"/>
               </a:rPr>
-              <a:t>   compatibilité</a:t>
+              <a:t>   meilleur prix</a:t>
+            </a:r>
+            <a:r>
+              <a:rPr sz="1100" b="1" i="0">
+                <a:solidFill>
+                  <a:srgbClr val="EE6A2C"/>
+                </a:solidFill>
+                <a:latin typeface="Arial"/>
+              </a:rPr>
+              <a:t>   départ en vacances</a:t>
             </a:r>
           </a:p>
         </p:txBody>
@@ -5607,14 +5625,470 @@
                 </a:solidFill>
                 <a:latin typeface="Arial"/>
               </a:rPr>
-              <a:t>À compléter : le rapport d'insights porte surtout sur les smartphones, pas sur les forfaits</a:t>
-            </a:r>
-          </a:p>
-        </p:txBody>
-      </p:sp>
-      <p:sp>
-        <p:nvSpPr>
-          <p:cNvPr id="65" name="TextBox 64"/>
+              <a:t>Quel forfait mobile sans engagement choisir ?</a:t>
+            </a:r>
+          </a:p>
+        </p:txBody>
+      </p:sp>
+      <p:sp>
+        <p:nvSpPr>
+          <p:cNvPr id="65" name="Rectangle 64"/>
+          <p:cNvSpPr/>
+          <p:nvPr/>
+        </p:nvSpPr>
+        <p:spPr>
+          <a:xfrm>
+            <a:off x="4437888" y="4632960"/>
+            <a:ext cx="2913888" cy="304800"/>
+          </a:xfrm>
+          <a:prstGeom prst="rect">
+            <a:avLst/>
+          </a:prstGeom>
+          <a:solidFill>
+            <a:srgbClr val="F1EFEA"/>
+          </a:solidFill>
+          <a:ln>
+            <a:noFill/>
+          </a:ln>
+          <a:effectLst/>
+        </p:spPr>
+        <p:style>
+          <a:lnRef idx="1">
+            <a:schemeClr val="accent1"/>
+          </a:lnRef>
+          <a:fillRef idx="3">
+            <a:schemeClr val="accent1"/>
+          </a:fillRef>
+          <a:effectRef idx="2">
+            <a:schemeClr val="accent1"/>
+          </a:effectRef>
+          <a:fontRef idx="minor">
+            <a:schemeClr val="lt1"/>
+          </a:fontRef>
+        </p:style>
+        <p:txBody>
+          <a:bodyPr rtlCol="0" anchor="ctr"/>
+          <a:lstStyle/>
+          <a:p>
+            <a:pPr algn="ctr"/>
+          </a:p>
+        </p:txBody>
+      </p:sp>
+      <p:sp>
+        <p:nvSpPr>
+          <p:cNvPr id="66" name="TextBox 65"/>
+          <p:cNvSpPr txBox="1"/>
+          <p:nvPr/>
+        </p:nvSpPr>
+        <p:spPr>
+          <a:xfrm>
+            <a:off x="4559808" y="4632960"/>
+            <a:ext cx="182880" cy="304800"/>
+          </a:xfrm>
+          <a:prstGeom prst="rect">
+            <a:avLst/>
+          </a:prstGeom>
+          <a:noFill/>
+        </p:spPr>
+        <p:txBody>
+          <a:bodyPr wrap="square" anchor="ctr" lIns="0" rIns="0" tIns="0" bIns="0">
+            <a:spAutoFit/>
+          </a:bodyPr>
+          <a:lstStyle/>
+          <a:p>
+            <a:pPr algn="l"/>
+            <a:r>
+              <a:rPr sz="900" b="0" i="0">
+                <a:solidFill>
+                  <a:srgbClr val="555B66"/>
+                </a:solidFill>
+                <a:latin typeface="Arial"/>
+              </a:rPr>
+              <a:t>🔍</a:t>
+            </a:r>
+          </a:p>
+        </p:txBody>
+      </p:sp>
+      <p:sp>
+        <p:nvSpPr>
+          <p:cNvPr id="67" name="TextBox 66"/>
+          <p:cNvSpPr txBox="1"/>
+          <p:nvPr/>
+        </p:nvSpPr>
+        <p:spPr>
+          <a:xfrm>
+            <a:off x="4791456" y="4632960"/>
+            <a:ext cx="2499360" cy="304800"/>
+          </a:xfrm>
+          <a:prstGeom prst="rect">
+            <a:avLst/>
+          </a:prstGeom>
+          <a:noFill/>
+        </p:spPr>
+        <p:txBody>
+          <a:bodyPr wrap="square" anchor="ctr" lIns="0" rIns="0" tIns="0" bIns="0">
+            <a:spAutoFit/>
+          </a:bodyPr>
+          <a:lstStyle/>
+          <a:p>
+            <a:pPr algn="l"/>
+            <a:r>
+              <a:rPr sz="900" b="0" i="0">
+                <a:solidFill>
+                  <a:srgbClr val="111111"/>
+                </a:solidFill>
+                <a:latin typeface="Arial"/>
+              </a:rPr>
+              <a:t>Puis-je utiliser une eSIM avec Cdiscount Mobile ?</a:t>
+            </a:r>
+          </a:p>
+        </p:txBody>
+      </p:sp>
+      <p:sp>
+        <p:nvSpPr>
+          <p:cNvPr id="68" name="Rectangle 67"/>
+          <p:cNvSpPr/>
+          <p:nvPr/>
+        </p:nvSpPr>
+        <p:spPr>
+          <a:xfrm>
+            <a:off x="4437888" y="4998720"/>
+            <a:ext cx="2913888" cy="304800"/>
+          </a:xfrm>
+          <a:prstGeom prst="rect">
+            <a:avLst/>
+          </a:prstGeom>
+          <a:solidFill>
+            <a:srgbClr val="F1EFEA"/>
+          </a:solidFill>
+          <a:ln>
+            <a:noFill/>
+          </a:ln>
+          <a:effectLst/>
+        </p:spPr>
+        <p:style>
+          <a:lnRef idx="1">
+            <a:schemeClr val="accent1"/>
+          </a:lnRef>
+          <a:fillRef idx="3">
+            <a:schemeClr val="accent1"/>
+          </a:fillRef>
+          <a:effectRef idx="2">
+            <a:schemeClr val="accent1"/>
+          </a:effectRef>
+          <a:fontRef idx="minor">
+            <a:schemeClr val="lt1"/>
+          </a:fontRef>
+        </p:style>
+        <p:txBody>
+          <a:bodyPr rtlCol="0" anchor="ctr"/>
+          <a:lstStyle/>
+          <a:p>
+            <a:pPr algn="ctr"/>
+          </a:p>
+        </p:txBody>
+      </p:sp>
+      <p:sp>
+        <p:nvSpPr>
+          <p:cNvPr id="69" name="TextBox 68"/>
+          <p:cNvSpPr txBox="1"/>
+          <p:nvPr/>
+        </p:nvSpPr>
+        <p:spPr>
+          <a:xfrm>
+            <a:off x="4559808" y="4998720"/>
+            <a:ext cx="182880" cy="304800"/>
+          </a:xfrm>
+          <a:prstGeom prst="rect">
+            <a:avLst/>
+          </a:prstGeom>
+          <a:noFill/>
+        </p:spPr>
+        <p:txBody>
+          <a:bodyPr wrap="square" anchor="ctr" lIns="0" rIns="0" tIns="0" bIns="0">
+            <a:spAutoFit/>
+          </a:bodyPr>
+          <a:lstStyle/>
+          <a:p>
+            <a:pPr algn="l"/>
+            <a:r>
+              <a:rPr sz="900" b="0" i="0">
+                <a:solidFill>
+                  <a:srgbClr val="555B66"/>
+                </a:solidFill>
+                <a:latin typeface="Arial"/>
+              </a:rPr>
+              <a:t>🔍</a:t>
+            </a:r>
+          </a:p>
+        </p:txBody>
+      </p:sp>
+      <p:sp>
+        <p:nvSpPr>
+          <p:cNvPr id="70" name="TextBox 69"/>
+          <p:cNvSpPr txBox="1"/>
+          <p:nvPr/>
+        </p:nvSpPr>
+        <p:spPr>
+          <a:xfrm>
+            <a:off x="4791456" y="4998720"/>
+            <a:ext cx="2499360" cy="304800"/>
+          </a:xfrm>
+          <a:prstGeom prst="rect">
+            <a:avLst/>
+          </a:prstGeom>
+          <a:noFill/>
+        </p:spPr>
+        <p:txBody>
+          <a:bodyPr wrap="square" anchor="ctr" lIns="0" rIns="0" tIns="0" bIns="0">
+            <a:spAutoFit/>
+          </a:bodyPr>
+          <a:lstStyle/>
+          <a:p>
+            <a:pPr algn="l"/>
+            <a:r>
+              <a:rPr sz="900" b="0" i="0">
+                <a:solidFill>
+                  <a:srgbClr val="111111"/>
+                </a:solidFill>
+                <a:latin typeface="Arial"/>
+              </a:rPr>
+              <a:t>Puis-je conserver mon numéro en changeant d'opérateur ?</a:t>
+            </a:r>
+          </a:p>
+        </p:txBody>
+      </p:sp>
+      <p:sp>
+        <p:nvSpPr>
+          <p:cNvPr id="71" name="Rectangle 70"/>
+          <p:cNvSpPr/>
+          <p:nvPr/>
+        </p:nvSpPr>
+        <p:spPr>
+          <a:xfrm>
+            <a:off x="4437888" y="5364480"/>
+            <a:ext cx="2913888" cy="304800"/>
+          </a:xfrm>
+          <a:prstGeom prst="rect">
+            <a:avLst/>
+          </a:prstGeom>
+          <a:solidFill>
+            <a:srgbClr val="F1EFEA"/>
+          </a:solidFill>
+          <a:ln>
+            <a:noFill/>
+          </a:ln>
+          <a:effectLst/>
+        </p:spPr>
+        <p:style>
+          <a:lnRef idx="1">
+            <a:schemeClr val="accent1"/>
+          </a:lnRef>
+          <a:fillRef idx="3">
+            <a:schemeClr val="accent1"/>
+          </a:fillRef>
+          <a:effectRef idx="2">
+            <a:schemeClr val="accent1"/>
+          </a:effectRef>
+          <a:fontRef idx="minor">
+            <a:schemeClr val="lt1"/>
+          </a:fontRef>
+        </p:style>
+        <p:txBody>
+          <a:bodyPr rtlCol="0" anchor="ctr"/>
+          <a:lstStyle/>
+          <a:p>
+            <a:pPr algn="ctr"/>
+          </a:p>
+        </p:txBody>
+      </p:sp>
+      <p:sp>
+        <p:nvSpPr>
+          <p:cNvPr id="72" name="TextBox 71"/>
+          <p:cNvSpPr txBox="1"/>
+          <p:nvPr/>
+        </p:nvSpPr>
+        <p:spPr>
+          <a:xfrm>
+            <a:off x="4559808" y="5364480"/>
+            <a:ext cx="182880" cy="304800"/>
+          </a:xfrm>
+          <a:prstGeom prst="rect">
+            <a:avLst/>
+          </a:prstGeom>
+          <a:noFill/>
+        </p:spPr>
+        <p:txBody>
+          <a:bodyPr wrap="square" anchor="ctr" lIns="0" rIns="0" tIns="0" bIns="0">
+            <a:spAutoFit/>
+          </a:bodyPr>
+          <a:lstStyle/>
+          <a:p>
+            <a:pPr algn="l"/>
+            <a:r>
+              <a:rPr sz="900" b="0" i="0">
+                <a:solidFill>
+                  <a:srgbClr val="555B66"/>
+                </a:solidFill>
+                <a:latin typeface="Arial"/>
+              </a:rPr>
+              <a:t>🔍</a:t>
+            </a:r>
+          </a:p>
+        </p:txBody>
+      </p:sp>
+      <p:sp>
+        <p:nvSpPr>
+          <p:cNvPr id="73" name="TextBox 72"/>
+          <p:cNvSpPr txBox="1"/>
+          <p:nvPr/>
+        </p:nvSpPr>
+        <p:spPr>
+          <a:xfrm>
+            <a:off x="4791456" y="5364480"/>
+            <a:ext cx="2499360" cy="304800"/>
+          </a:xfrm>
+          <a:prstGeom prst="rect">
+            <a:avLst/>
+          </a:prstGeom>
+          <a:noFill/>
+        </p:spPr>
+        <p:txBody>
+          <a:bodyPr wrap="square" anchor="ctr" lIns="0" rIns="0" tIns="0" bIns="0">
+            <a:spAutoFit/>
+          </a:bodyPr>
+          <a:lstStyle/>
+          <a:p>
+            <a:pPr algn="l"/>
+            <a:r>
+              <a:rPr sz="900" b="0" i="0">
+                <a:solidFill>
+                  <a:srgbClr val="111111"/>
+                </a:solidFill>
+                <a:latin typeface="Arial"/>
+              </a:rPr>
+              <a:t>Quel forfait pour faire du partage de connexion ?</a:t>
+            </a:r>
+          </a:p>
+        </p:txBody>
+      </p:sp>
+      <p:sp>
+        <p:nvSpPr>
+          <p:cNvPr id="74" name="Rectangle 73"/>
+          <p:cNvSpPr/>
+          <p:nvPr/>
+        </p:nvSpPr>
+        <p:spPr>
+          <a:xfrm>
+            <a:off x="4437888" y="5730240"/>
+            <a:ext cx="2913888" cy="304800"/>
+          </a:xfrm>
+          <a:prstGeom prst="rect">
+            <a:avLst/>
+          </a:prstGeom>
+          <a:solidFill>
+            <a:srgbClr val="F1EFEA"/>
+          </a:solidFill>
+          <a:ln>
+            <a:noFill/>
+          </a:ln>
+          <a:effectLst/>
+        </p:spPr>
+        <p:style>
+          <a:lnRef idx="1">
+            <a:schemeClr val="accent1"/>
+          </a:lnRef>
+          <a:fillRef idx="3">
+            <a:schemeClr val="accent1"/>
+          </a:fillRef>
+          <a:effectRef idx="2">
+            <a:schemeClr val="accent1"/>
+          </a:effectRef>
+          <a:fontRef idx="minor">
+            <a:schemeClr val="lt1"/>
+          </a:fontRef>
+        </p:style>
+        <p:txBody>
+          <a:bodyPr rtlCol="0" anchor="ctr"/>
+          <a:lstStyle/>
+          <a:p>
+            <a:pPr algn="ctr"/>
+          </a:p>
+        </p:txBody>
+      </p:sp>
+      <p:sp>
+        <p:nvSpPr>
+          <p:cNvPr id="75" name="TextBox 74"/>
+          <p:cNvSpPr txBox="1"/>
+          <p:nvPr/>
+        </p:nvSpPr>
+        <p:spPr>
+          <a:xfrm>
+            <a:off x="4559808" y="5730240"/>
+            <a:ext cx="182880" cy="304800"/>
+          </a:xfrm>
+          <a:prstGeom prst="rect">
+            <a:avLst/>
+          </a:prstGeom>
+          <a:noFill/>
+        </p:spPr>
+        <p:txBody>
+          <a:bodyPr wrap="square" anchor="ctr" lIns="0" rIns="0" tIns="0" bIns="0">
+            <a:spAutoFit/>
+          </a:bodyPr>
+          <a:lstStyle/>
+          <a:p>
+            <a:pPr algn="l"/>
+            <a:r>
+              <a:rPr sz="900" b="0" i="0">
+                <a:solidFill>
+                  <a:srgbClr val="555B66"/>
+                </a:solidFill>
+                <a:latin typeface="Arial"/>
+              </a:rPr>
+              <a:t>🔍</a:t>
+            </a:r>
+          </a:p>
+        </p:txBody>
+      </p:sp>
+      <p:sp>
+        <p:nvSpPr>
+          <p:cNvPr id="76" name="TextBox 75"/>
+          <p:cNvSpPr txBox="1"/>
+          <p:nvPr/>
+        </p:nvSpPr>
+        <p:spPr>
+          <a:xfrm>
+            <a:off x="4791456" y="5730240"/>
+            <a:ext cx="2499360" cy="304800"/>
+          </a:xfrm>
+          <a:prstGeom prst="rect">
+            <a:avLst/>
+          </a:prstGeom>
+          <a:noFill/>
+        </p:spPr>
+        <p:txBody>
+          <a:bodyPr wrap="square" anchor="ctr" lIns="0" rIns="0" tIns="0" bIns="0">
+            <a:spAutoFit/>
+          </a:bodyPr>
+          <a:lstStyle/>
+          <a:p>
+            <a:pPr algn="l"/>
+            <a:r>
+              <a:rPr sz="900" b="0" i="0">
+                <a:solidFill>
+                  <a:srgbClr val="111111"/>
+                </a:solidFill>
+                <a:latin typeface="Arial"/>
+              </a:rPr>
+              <a:t>Quel forfait prendre pour partir en vacances à l'étranger ?</a:t>
+            </a:r>
+          </a:p>
+        </p:txBody>
+      </p:sp>
+      <p:sp>
+        <p:nvSpPr>
+          <p:cNvPr id="77" name="TextBox 76"/>
           <p:cNvSpPr txBox="1"/>
           <p:nvPr/>
         </p:nvSpPr>
@@ -5649,7 +6123,7 @@
       </p:sp>
       <p:sp>
         <p:nvSpPr>
-          <p:cNvPr id="66" name="TextBox 65"/>
+          <p:cNvPr id="78" name="TextBox 77"/>
           <p:cNvSpPr txBox="1"/>
           <p:nvPr/>
         </p:nvSpPr>
@@ -5684,7 +6158,7 @@
       </p:sp>
       <p:sp>
         <p:nvSpPr>
-          <p:cNvPr id="67" name="TextBox 66"/>
+          <p:cNvPr id="79" name="TextBox 78"/>
           <p:cNvSpPr txBox="1"/>
           <p:nvPr/>
         </p:nvSpPr>
@@ -5719,7 +6193,7 @@
       </p:sp>
       <p:sp>
         <p:nvSpPr>
-          <p:cNvPr id="68" name="Rectangle 67"/>
+          <p:cNvPr id="80" name="Rectangle 79"/>
           <p:cNvSpPr/>
           <p:nvPr/>
         </p:nvSpPr>
@@ -5763,7 +6237,7 @@
       </p:sp>
       <p:sp>
         <p:nvSpPr>
-          <p:cNvPr id="69" name="TextBox 68"/>
+          <p:cNvPr id="81" name="TextBox 80"/>
           <p:cNvSpPr txBox="1"/>
           <p:nvPr/>
         </p:nvSpPr>
@@ -5785,20 +6259,20 @@
           <a:p>
             <a:pPr algn="l"/>
             <a:r>
-              <a:rPr sz="800" b="0" i="0">
+              <a:rPr sz="1000" b="0" i="0">
                 <a:solidFill>
                   <a:srgbClr val="111111"/>
                 </a:solidFill>
                 <a:latin typeface="Arial"/>
               </a:rPr>
-              <a:t>Recherche générale d'un forfait · &lt; 1 %</a:t>
-            </a:r>
-          </a:p>
-        </p:txBody>
-      </p:sp>
-      <p:sp>
-        <p:nvSpPr>
-          <p:cNvPr id="70" name="Rectangle 69"/>
+              <a:t>Recherche générale d'un forfait</a:t>
+            </a:r>
+          </a:p>
+        </p:txBody>
+      </p:sp>
+      <p:sp>
+        <p:nvSpPr>
+          <p:cNvPr id="82" name="Rectangle 81"/>
           <p:cNvSpPr/>
           <p:nvPr/>
         </p:nvSpPr>
@@ -5842,7 +6316,7 @@
       </p:sp>
       <p:sp>
         <p:nvSpPr>
-          <p:cNvPr id="71" name="TextBox 70"/>
+          <p:cNvPr id="83" name="TextBox 82"/>
           <p:cNvSpPr txBox="1"/>
           <p:nvPr/>
         </p:nvSpPr>
@@ -5870,14 +6344,14 @@
                 </a:solidFill>
                 <a:latin typeface="Arial"/>
               </a:rPr>
-              <a:t>eSIM et carte SIM · &lt; 1 %</a:t>
-            </a:r>
-          </a:p>
-        </p:txBody>
-      </p:sp>
-      <p:sp>
-        <p:nvSpPr>
-          <p:cNvPr id="72" name="Rectangle 71"/>
+              <a:t>eSIM et carte SIM · 25 %</a:t>
+            </a:r>
+          </a:p>
+        </p:txBody>
+      </p:sp>
+      <p:sp>
+        <p:nvSpPr>
+          <p:cNvPr id="84" name="Rectangle 83"/>
           <p:cNvSpPr/>
           <p:nvPr/>
         </p:nvSpPr>
@@ -5921,7 +6395,7 @@
       </p:sp>
       <p:sp>
         <p:nvSpPr>
-          <p:cNvPr id="73" name="TextBox 72"/>
+          <p:cNvPr id="85" name="TextBox 84"/>
           <p:cNvSpPr txBox="1"/>
           <p:nvPr/>
         </p:nvSpPr>
@@ -5949,14 +6423,14 @@
                 </a:solidFill>
                 <a:latin typeface="Arial"/>
               </a:rPr>
-              <a:t>Prix et sans engagement · 66 %</a:t>
-            </a:r>
-          </a:p>
-        </p:txBody>
-      </p:sp>
-      <p:sp>
-        <p:nvSpPr>
-          <p:cNvPr id="74" name="Rectangle 73"/>
+              <a:t>Prix et sans engagement · 15 %</a:t>
+            </a:r>
+          </a:p>
+        </p:txBody>
+      </p:sp>
+      <p:sp>
+        <p:nvSpPr>
+          <p:cNvPr id="86" name="Rectangle 85"/>
           <p:cNvSpPr/>
           <p:nvPr/>
         </p:nvSpPr>
@@ -6000,7 +6474,7 @@
       </p:sp>
       <p:sp>
         <p:nvSpPr>
-          <p:cNvPr id="75" name="TextBox 74"/>
+          <p:cNvPr id="87" name="TextBox 86"/>
           <p:cNvSpPr txBox="1"/>
           <p:nvPr/>
         </p:nvSpPr>
@@ -6028,14 +6502,14 @@
                 </a:solidFill>
                 <a:latin typeface="Arial"/>
               </a:rPr>
-              <a:t>Partage de connexion et nomade · &lt; 1 %</a:t>
-            </a:r>
-          </a:p>
-        </p:txBody>
-      </p:sp>
-      <p:sp>
-        <p:nvSpPr>
-          <p:cNvPr id="76" name="Rectangle 75"/>
+              <a:t>Partage de connexion et nomade · 12 %</a:t>
+            </a:r>
+          </a:p>
+        </p:txBody>
+      </p:sp>
+      <p:sp>
+        <p:nvSpPr>
+          <p:cNvPr id="88" name="Rectangle 87"/>
           <p:cNvSpPr/>
           <p:nvPr/>
         </p:nvSpPr>
@@ -6079,7 +6553,7 @@
       </p:sp>
       <p:sp>
         <p:nvSpPr>
-          <p:cNvPr id="77" name="TextBox 76"/>
+          <p:cNvPr id="89" name="TextBox 88"/>
           <p:cNvSpPr txBox="1"/>
           <p:nvPr/>
         </p:nvSpPr>
@@ -6107,14 +6581,14 @@
                 </a:solidFill>
                 <a:latin typeface="Arial"/>
               </a:rPr>
-              <a:t>5G et volume de data · 34 %</a:t>
-            </a:r>
-          </a:p>
-        </p:txBody>
-      </p:sp>
-      <p:sp>
-        <p:nvSpPr>
-          <p:cNvPr id="78" name="Rectangle 77"/>
+              <a:t>5G et volume de data · 6 %</a:t>
+            </a:r>
+          </a:p>
+        </p:txBody>
+      </p:sp>
+      <p:sp>
+        <p:nvSpPr>
+          <p:cNvPr id="90" name="Rectangle 89"/>
           <p:cNvSpPr/>
           <p:nvPr/>
         </p:nvSpPr>
@@ -6158,7 +6632,7 @@
       </p:sp>
       <p:sp>
         <p:nvSpPr>
-          <p:cNvPr id="79" name="TextBox 78"/>
+          <p:cNvPr id="91" name="TextBox 90"/>
           <p:cNvSpPr txBox="1"/>
           <p:nvPr/>
         </p:nvSpPr>
@@ -6186,14 +6660,14 @@
                 </a:solidFill>
                 <a:latin typeface="Arial"/>
               </a:rPr>
-              <a:t>International et roaming · &lt; 1 %</a:t>
-            </a:r>
-          </a:p>
-        </p:txBody>
-      </p:sp>
-      <p:sp>
-        <p:nvSpPr>
-          <p:cNvPr id="80" name="Rectangle 79"/>
+              <a:t>International et roaming · 4 %</a:t>
+            </a:r>
+          </a:p>
+        </p:txBody>
+      </p:sp>
+      <p:sp>
+        <p:nvSpPr>
+          <p:cNvPr id="92" name="Rectangle 91"/>
           <p:cNvSpPr/>
           <p:nvPr/>
         </p:nvSpPr>
@@ -6237,7 +6711,7 @@
       </p:sp>
       <p:sp>
         <p:nvSpPr>
-          <p:cNvPr id="81" name="TextBox 80"/>
+          <p:cNvPr id="93" name="TextBox 92"/>
           <p:cNvSpPr txBox="1"/>
           <p:nvPr/>
         </p:nvSpPr>
@@ -6265,14 +6739,14 @@
                 </a:solidFill>
                 <a:latin typeface="Arial"/>
               </a:rPr>
-              <a:t>Changement d'opérateur · &lt; 1 %</a:t>
-            </a:r>
-          </a:p>
-        </p:txBody>
-      </p:sp>
-      <p:sp>
-        <p:nvSpPr>
-          <p:cNvPr id="82" name="Rectangle 81"/>
+              <a:t>Changement d'opérateur · 1 %</a:t>
+            </a:r>
+          </a:p>
+        </p:txBody>
+      </p:sp>
+      <p:sp>
+        <p:nvSpPr>
+          <p:cNvPr id="94" name="Rectangle 93"/>
           <p:cNvSpPr/>
           <p:nvPr/>
         </p:nvSpPr>
@@ -6316,7 +6790,7 @@
       </p:sp>
       <p:sp>
         <p:nvSpPr>
-          <p:cNvPr id="83" name="TextBox 82"/>
+          <p:cNvPr id="95" name="TextBox 94"/>
           <p:cNvSpPr txBox="1"/>
           <p:nvPr/>
         </p:nvSpPr>
@@ -6344,21 +6818,21 @@
                 </a:solidFill>
                 <a:latin typeface="Arial"/>
               </a:rPr>
-              <a:t>Forfaits par profil · &lt; 1 %</a:t>
-            </a:r>
-          </a:p>
-        </p:txBody>
-      </p:sp>
-      <p:sp>
-        <p:nvSpPr>
-          <p:cNvPr id="84" name="Rectangle 83"/>
+              <a:t>Forfaits par profil · 1 %</a:t>
+            </a:r>
+          </a:p>
+        </p:txBody>
+      </p:sp>
+      <p:sp>
+        <p:nvSpPr>
+          <p:cNvPr id="96" name="Rectangle 95"/>
           <p:cNvSpPr/>
           <p:nvPr/>
         </p:nvSpPr>
         <p:spPr>
           <a:xfrm>
             <a:off x="10564368" y="4450080"/>
-            <a:ext cx="475488" cy="0"/>
+            <a:ext cx="475488" cy="482803"/>
           </a:xfrm>
           <a:prstGeom prst="rect">
             <a:avLst/>
@@ -6395,14 +6869,49 @@
       </p:sp>
       <p:sp>
         <p:nvSpPr>
-          <p:cNvPr id="85" name="Rectangle 84"/>
+          <p:cNvPr id="97" name="TextBox 96"/>
+          <p:cNvSpPr txBox="1"/>
+          <p:nvPr/>
+        </p:nvSpPr>
+        <p:spPr>
+          <a:xfrm>
+            <a:off x="10564368" y="4450080"/>
+            <a:ext cx="475488" cy="482803"/>
+          </a:xfrm>
+          <a:prstGeom prst="rect">
+            <a:avLst/>
+          </a:prstGeom>
+          <a:noFill/>
+        </p:spPr>
+        <p:txBody>
+          <a:bodyPr wrap="square" anchor="ctr" lIns="0" rIns="0" tIns="0" bIns="0">
+            <a:spAutoFit/>
+          </a:bodyPr>
+          <a:lstStyle/>
+          <a:p>
+            <a:pPr algn="ctr"/>
+            <a:r>
+              <a:rPr sz="1000" b="1" i="0">
+                <a:solidFill>
+                  <a:srgbClr val="FFFFFF"/>
+                </a:solidFill>
+                <a:latin typeface="Arial"/>
+              </a:rPr>
+              <a:t>36 %</a:t>
+            </a:r>
+          </a:p>
+        </p:txBody>
+      </p:sp>
+      <p:sp>
+        <p:nvSpPr>
+          <p:cNvPr id="98" name="Rectangle 97"/>
           <p:cNvSpPr/>
           <p:nvPr/>
         </p:nvSpPr>
         <p:spPr>
           <a:xfrm>
-            <a:off x="10564368" y="4450080"/>
-            <a:ext cx="475488" cy="0"/>
+            <a:off x="10564368" y="4932883"/>
+            <a:ext cx="475488" cy="335280"/>
           </a:xfrm>
           <a:prstGeom prst="rect">
             <a:avLst/>
@@ -6439,14 +6948,49 @@
       </p:sp>
       <p:sp>
         <p:nvSpPr>
-          <p:cNvPr id="86" name="Rectangle 85"/>
+          <p:cNvPr id="99" name="TextBox 98"/>
+          <p:cNvSpPr txBox="1"/>
+          <p:nvPr/>
+        </p:nvSpPr>
+        <p:spPr>
+          <a:xfrm>
+            <a:off x="10564368" y="4932883"/>
+            <a:ext cx="475488" cy="335280"/>
+          </a:xfrm>
+          <a:prstGeom prst="rect">
+            <a:avLst/>
+          </a:prstGeom>
+          <a:noFill/>
+        </p:spPr>
+        <p:txBody>
+          <a:bodyPr wrap="square" anchor="ctr" lIns="0" rIns="0" tIns="0" bIns="0">
+            <a:spAutoFit/>
+          </a:bodyPr>
+          <a:lstStyle/>
+          <a:p>
+            <a:pPr algn="ctr"/>
+            <a:r>
+              <a:rPr sz="1000" b="1" i="0">
+                <a:solidFill>
+                  <a:srgbClr val="FFFFFF"/>
+                </a:solidFill>
+                <a:latin typeface="Arial"/>
+              </a:rPr>
+              <a:t>25 %</a:t>
+            </a:r>
+          </a:p>
+        </p:txBody>
+      </p:sp>
+      <p:sp>
+        <p:nvSpPr>
+          <p:cNvPr id="100" name="Rectangle 99"/>
           <p:cNvSpPr/>
           <p:nvPr/>
         </p:nvSpPr>
         <p:spPr>
           <a:xfrm>
-            <a:off x="10564368" y="4450080"/>
-            <a:ext cx="475488" cy="885139"/>
+            <a:off x="10564368" y="5268163"/>
+            <a:ext cx="475488" cy="201168"/>
           </a:xfrm>
           <a:prstGeom prst="rect">
             <a:avLst/>
@@ -6483,49 +7027,14 @@
       </p:sp>
       <p:sp>
         <p:nvSpPr>
-          <p:cNvPr id="87" name="TextBox 86"/>
-          <p:cNvSpPr txBox="1"/>
-          <p:nvPr/>
-        </p:nvSpPr>
-        <p:spPr>
-          <a:xfrm>
-            <a:off x="10564368" y="4450080"/>
-            <a:ext cx="475488" cy="885139"/>
-          </a:xfrm>
-          <a:prstGeom prst="rect">
-            <a:avLst/>
-          </a:prstGeom>
-          <a:noFill/>
-        </p:spPr>
-        <p:txBody>
-          <a:bodyPr wrap="square" anchor="ctr" lIns="0" rIns="0" tIns="0" bIns="0">
-            <a:spAutoFit/>
-          </a:bodyPr>
-          <a:lstStyle/>
-          <a:p>
-            <a:pPr algn="ctr"/>
-            <a:r>
-              <a:rPr sz="1000" b="1" i="0">
-                <a:solidFill>
-                  <a:srgbClr val="FFFFFF"/>
-                </a:solidFill>
-                <a:latin typeface="Arial"/>
-              </a:rPr>
-              <a:t>66 %</a:t>
-            </a:r>
-          </a:p>
-        </p:txBody>
-      </p:sp>
-      <p:sp>
-        <p:nvSpPr>
-          <p:cNvPr id="88" name="Rectangle 87"/>
+          <p:cNvPr id="101" name="Rectangle 100"/>
           <p:cNvSpPr/>
           <p:nvPr/>
         </p:nvSpPr>
         <p:spPr>
           <a:xfrm>
-            <a:off x="10564368" y="5335219"/>
-            <a:ext cx="475488" cy="0"/>
+            <a:off x="10564368" y="5469331"/>
+            <a:ext cx="475488" cy="160934"/>
           </a:xfrm>
           <a:prstGeom prst="rect">
             <a:avLst/>
@@ -6562,14 +7071,14 @@
       </p:sp>
       <p:sp>
         <p:nvSpPr>
-          <p:cNvPr id="89" name="Rectangle 88"/>
+          <p:cNvPr id="102" name="Rectangle 101"/>
           <p:cNvSpPr/>
           <p:nvPr/>
         </p:nvSpPr>
         <p:spPr>
           <a:xfrm>
-            <a:off x="10564368" y="5335219"/>
-            <a:ext cx="475488" cy="455980"/>
+            <a:off x="10564368" y="5630265"/>
+            <a:ext cx="475488" cy="80467"/>
           </a:xfrm>
           <a:prstGeom prst="rect">
             <a:avLst/>
@@ -6606,49 +7115,14 @@
       </p:sp>
       <p:sp>
         <p:nvSpPr>
-          <p:cNvPr id="90" name="TextBox 89"/>
-          <p:cNvSpPr txBox="1"/>
-          <p:nvPr/>
-        </p:nvSpPr>
-        <p:spPr>
-          <a:xfrm>
-            <a:off x="10564368" y="5335219"/>
-            <a:ext cx="475488" cy="455980"/>
-          </a:xfrm>
-          <a:prstGeom prst="rect">
-            <a:avLst/>
-          </a:prstGeom>
-          <a:noFill/>
-        </p:spPr>
-        <p:txBody>
-          <a:bodyPr wrap="square" anchor="ctr" lIns="0" rIns="0" tIns="0" bIns="0">
-            <a:spAutoFit/>
-          </a:bodyPr>
-          <a:lstStyle/>
-          <a:p>
-            <a:pPr algn="ctr"/>
-            <a:r>
-              <a:rPr sz="1000" b="1" i="0">
-                <a:solidFill>
-                  <a:srgbClr val="FFFFFF"/>
-                </a:solidFill>
-                <a:latin typeface="Arial"/>
-              </a:rPr>
-              <a:t>34 %</a:t>
-            </a:r>
-          </a:p>
-        </p:txBody>
-      </p:sp>
-      <p:sp>
-        <p:nvSpPr>
-          <p:cNvPr id="91" name="Rectangle 90"/>
+          <p:cNvPr id="103" name="Rectangle 102"/>
           <p:cNvSpPr/>
           <p:nvPr/>
         </p:nvSpPr>
         <p:spPr>
           <a:xfrm>
-            <a:off x="10564368" y="5791200"/>
-            <a:ext cx="475488" cy="0"/>
+            <a:off x="10564368" y="5710732"/>
+            <a:ext cx="475488" cy="53644"/>
           </a:xfrm>
           <a:prstGeom prst="rect">
             <a:avLst/>
@@ -6685,14 +7159,14 @@
       </p:sp>
       <p:sp>
         <p:nvSpPr>
-          <p:cNvPr id="92" name="Rectangle 91"/>
+          <p:cNvPr id="104" name="Rectangle 103"/>
           <p:cNvSpPr/>
           <p:nvPr/>
         </p:nvSpPr>
         <p:spPr>
           <a:xfrm>
-            <a:off x="10564368" y="5791200"/>
-            <a:ext cx="475488" cy="0"/>
+            <a:off x="10564368" y="5764377"/>
+            <a:ext cx="475488" cy="13411"/>
           </a:xfrm>
           <a:prstGeom prst="rect">
             <a:avLst/>
@@ -6729,14 +7203,14 @@
       </p:sp>
       <p:sp>
         <p:nvSpPr>
-          <p:cNvPr id="93" name="Rectangle 92"/>
+          <p:cNvPr id="105" name="Rectangle 104"/>
           <p:cNvSpPr/>
           <p:nvPr/>
         </p:nvSpPr>
         <p:spPr>
           <a:xfrm>
-            <a:off x="10564368" y="5791200"/>
-            <a:ext cx="475488" cy="0"/>
+            <a:off x="10564368" y="5777788"/>
+            <a:ext cx="475488" cy="13411"/>
           </a:xfrm>
           <a:prstGeom prst="rect">
             <a:avLst/>

--- a/rapports/septembre/Cdiscount_Mobile_sept2026.pptx
+++ b/rapports/septembre/Cdiscount_Mobile_sept2026.pptx
@@ -7867,7 +7867,7 @@
                 </a:solidFill>
                 <a:latin typeface="Arial"/>
               </a:rPr>
-              <a:t>Les 3 annonces diffusées sont entre 0,99 et 1,02 fois la moyenne : elles ne permettent pas de tester d'autres messages.</a:t>
+              <a:t>Les 3 annonces diffusées sont entre 0,99 et 1,02 fois la moyenne, et ne permettent pas de tester d'autres messages.</a:t>
             </a:r>
           </a:p>
         </p:txBody>
